--- a/lecture_slides/1.day1_before_lunch/lecture_1a_intro_gfm.pptx
+++ b/lecture_slides/1.day1_before_lunch/lecture_1a_intro_gfm.pptx
@@ -3376,7 +3376,7 @@
         <a:p>
           <a:r>
             <a:rPr lang="en-US" dirty="0"/>
-            <a:t>From Multilayer NN to Large Language Model</a:t>
+            <a:t>From Multilayer NN to Large Language Models</a:t>
           </a:r>
         </a:p>
       </dgm:t>
@@ -4778,7 +4778,7 @@
 Predicts promoters, splice sites and TFBS, after fine-tuning using </a:t>
           </a:r>
           <a:r>
-            <a:rPr lang="en-US" u="sng" dirty="0"/>
+            <a:rPr lang="en-US" u="none" dirty="0"/>
             <a:t>small task-specific labeled data</a:t>
           </a:r>
         </a:p>
@@ -4909,7 +4909,7 @@
           </a:r>
           <a:r>
             <a:rPr lang="en-US" dirty="0"/>
-            <a:t>, like rare diseases and difficult-to-access tissues</a:t>
+            <a:t>, like rare diseases and difficult-to-access tissues due to transfer learning</a:t>
           </a:r>
         </a:p>
       </dgm:t>
@@ -5060,7 +5060,7 @@
           <a:pPr rtl="0"/>
           <a:r>
             <a:rPr lang="en-US" dirty="0"/>
-            <a:t>Evo2 demonstrates over 90% accuracy in predicting the functional impact of mutations in genes such as BRCA1</a:t>
+            <a:t>Evo2 achieves &gt;0.87 AUROC (state-of-the-art) in zero-shot variant prediction for BRCA1</a:t>
           </a:r>
         </a:p>
       </dgm:t>
@@ -5409,7 +5409,7 @@
           </a:pPr>
           <a:r>
             <a:rPr lang="en-US" sz="1600" kern="1200" dirty="0"/>
-            <a:t>From Multilayer NN to Large Language Model</a:t>
+            <a:t>From Multilayer NN to Large Language Models</a:t>
           </a:r>
         </a:p>
       </dsp:txBody>
@@ -7072,7 +7072,7 @@
       </dsp:nvSpPr>
       <dsp:spPr>
         <a:xfrm>
-          <a:off x="3523" y="76785"/>
+          <a:off x="3523" y="175605"/>
           <a:ext cx="2118903" cy="811302"/>
         </a:xfrm>
         <a:prstGeom prst="rect">
@@ -7139,7 +7139,7 @@
         </a:p>
       </dsp:txBody>
       <dsp:txXfrm>
-        <a:off x="3523" y="76785"/>
+        <a:off x="3523" y="175605"/>
         <a:ext cx="2118903" cy="811302"/>
       </dsp:txXfrm>
     </dsp:sp>
@@ -7150,8 +7150,8 @@
       </dsp:nvSpPr>
       <dsp:spPr>
         <a:xfrm>
-          <a:off x="3523" y="888087"/>
-          <a:ext cx="2118903" cy="3656339"/>
+          <a:off x="3523" y="986907"/>
+          <a:ext cx="2118903" cy="3458699"/>
         </a:xfrm>
         <a:prstGeom prst="rect">
           <a:avLst/>
@@ -7223,14 +7223,14 @@
 Predicts promoters, splice sites and TFBS, after fine-tuning using </a:t>
           </a:r>
           <a:r>
-            <a:rPr lang="en-US" sz="1600" u="sng" kern="1200" dirty="0"/>
+            <a:rPr lang="en-US" sz="1600" u="none" kern="1200" dirty="0"/>
             <a:t>small task-specific labeled data</a:t>
           </a:r>
         </a:p>
       </dsp:txBody>
       <dsp:txXfrm>
-        <a:off x="3523" y="888087"/>
-        <a:ext cx="2118903" cy="3656339"/>
+        <a:off x="3523" y="986907"/>
+        <a:ext cx="2118903" cy="3458699"/>
       </dsp:txXfrm>
     </dsp:sp>
     <dsp:sp modelId="{4A8021B2-6493-1445-B0E3-8B96A9608741}">
@@ -7240,7 +7240,7 @@
       </dsp:nvSpPr>
       <dsp:spPr>
         <a:xfrm>
-          <a:off x="2419073" y="76785"/>
+          <a:off x="2419073" y="175605"/>
           <a:ext cx="2118903" cy="811302"/>
         </a:xfrm>
         <a:prstGeom prst="rect">
@@ -7307,7 +7307,7 @@
         </a:p>
       </dsp:txBody>
       <dsp:txXfrm>
-        <a:off x="2419073" y="76785"/>
+        <a:off x="2419073" y="175605"/>
         <a:ext cx="2118903" cy="811302"/>
       </dsp:txXfrm>
     </dsp:sp>
@@ -7318,8 +7318,8 @@
       </dsp:nvSpPr>
       <dsp:spPr>
         <a:xfrm>
-          <a:off x="2419073" y="888087"/>
-          <a:ext cx="2118903" cy="3656339"/>
+          <a:off x="2419073" y="986907"/>
+          <a:ext cx="2118903" cy="3458699"/>
         </a:xfrm>
         <a:prstGeom prst="rect">
           <a:avLst/>
@@ -7409,8 +7409,8 @@
         </a:p>
       </dsp:txBody>
       <dsp:txXfrm>
-        <a:off x="2419073" y="888087"/>
-        <a:ext cx="2118903" cy="3656339"/>
+        <a:off x="2419073" y="986907"/>
+        <a:ext cx="2118903" cy="3458699"/>
       </dsp:txXfrm>
     </dsp:sp>
     <dsp:sp modelId="{3945EC42-A062-0744-A47A-48C193DF9F9F}">
@@ -7420,7 +7420,7 @@
       </dsp:nvSpPr>
       <dsp:spPr>
         <a:xfrm>
-          <a:off x="4834623" y="76785"/>
+          <a:off x="4834623" y="175605"/>
           <a:ext cx="2118903" cy="811302"/>
         </a:xfrm>
         <a:prstGeom prst="rect">
@@ -7487,7 +7487,7 @@
         </a:p>
       </dsp:txBody>
       <dsp:txXfrm>
-        <a:off x="4834623" y="76785"/>
+        <a:off x="4834623" y="175605"/>
         <a:ext cx="2118903" cy="811302"/>
       </dsp:txXfrm>
     </dsp:sp>
@@ -7498,8 +7498,8 @@
       </dsp:nvSpPr>
       <dsp:spPr>
         <a:xfrm>
-          <a:off x="4834623" y="888087"/>
-          <a:ext cx="2118903" cy="3656339"/>
+          <a:off x="4834623" y="986907"/>
+          <a:ext cx="2118903" cy="3458699"/>
         </a:xfrm>
         <a:prstGeom prst="rect">
           <a:avLst/>
@@ -7583,13 +7583,13 @@
           </a:r>
           <a:r>
             <a:rPr lang="en-US" sz="1600" kern="1200" dirty="0"/>
-            <a:t>, like rare diseases and difficult-to-access tissues</a:t>
+            <a:t>, like rare diseases and difficult-to-access tissues due to transfer learning</a:t>
           </a:r>
         </a:p>
       </dsp:txBody>
       <dsp:txXfrm>
-        <a:off x="4834623" y="888087"/>
-        <a:ext cx="2118903" cy="3656339"/>
+        <a:off x="4834623" y="986907"/>
+        <a:ext cx="2118903" cy="3458699"/>
       </dsp:txXfrm>
     </dsp:sp>
     <dsp:sp modelId="{64DF03D9-CF17-2E43-A5B0-69A05C2B8414}">
@@ -7599,7 +7599,7 @@
       </dsp:nvSpPr>
       <dsp:spPr>
         <a:xfrm>
-          <a:off x="7250172" y="76785"/>
+          <a:off x="7250172" y="175605"/>
           <a:ext cx="2118903" cy="811302"/>
         </a:xfrm>
         <a:prstGeom prst="rect">
@@ -7666,7 +7666,7 @@
         </a:p>
       </dsp:txBody>
       <dsp:txXfrm>
-        <a:off x="7250172" y="76785"/>
+        <a:off x="7250172" y="175605"/>
         <a:ext cx="2118903" cy="811302"/>
       </dsp:txXfrm>
     </dsp:sp>
@@ -7677,8 +7677,8 @@
       </dsp:nvSpPr>
       <dsp:spPr>
         <a:xfrm>
-          <a:off x="7250172" y="888087"/>
-          <a:ext cx="2118903" cy="3656339"/>
+          <a:off x="7250172" y="986907"/>
+          <a:ext cx="2118903" cy="3458699"/>
         </a:xfrm>
         <a:prstGeom prst="rect">
           <a:avLst/>
@@ -7741,7 +7741,7 @@
           </a:pPr>
           <a:r>
             <a:rPr lang="en-US" sz="1600" kern="1200" dirty="0"/>
-            <a:t>Evo2 demonstrates over 90% accuracy in predicting the functional impact of mutations in genes such as BRCA1</a:t>
+            <a:t>Evo2 achieves &gt;0.87 AUROC (state-of-the-art) in zero-shot variant prediction for BRCA1</a:t>
           </a:r>
         </a:p>
         <a:p>
@@ -7764,8 +7764,8 @@
         </a:p>
       </dsp:txBody>
       <dsp:txXfrm>
-        <a:off x="7250172" y="888087"/>
-        <a:ext cx="2118903" cy="3656339"/>
+        <a:off x="7250172" y="986907"/>
+        <a:ext cx="2118903" cy="3458699"/>
       </dsp:txXfrm>
     </dsp:sp>
   </dsp:spTree>
@@ -12796,7 +12796,7 @@
           <a:p>
             <a:fld id="{30E08F2E-5F06-4CE2-A139-452A1382A6F0}" type="datetimeFigureOut">
               <a:rPr lang="en-US"/>
-              <a:t>5/25/25</a:t>
+              <a:t>2/10/26</a:t>
             </a:fld>
             <a:endParaRPr/>
           </a:p>
@@ -12961,7 +12961,7 @@
           <a:p>
             <a:fld id="{1A4C5DC6-1594-414D-9341-ABA08739246C}" type="datetimeFigureOut">
               <a:rPr lang="en-US"/>
-              <a:t>5/25/25</a:t>
+              <a:t>2/10/26</a:t>
             </a:fld>
             <a:endParaRPr/>
           </a:p>
@@ -13307,7 +13307,573 @@
 </p:notes>
 </file>
 
+<file path=ppt/notesSlides/notesSlide10.xml><?xml version="1.0" encoding="utf-8"?>
+<p:notes xmlns:a="http://schemas.openxmlformats.org/drawingml/2006/main" xmlns:r="http://schemas.openxmlformats.org/officeDocument/2006/relationships" xmlns:p="http://schemas.openxmlformats.org/presentationml/2006/main">
+  <p:cSld>
+    <p:spTree>
+      <p:nvGrpSpPr>
+        <p:cNvPr id="1" name=""/>
+        <p:cNvGrpSpPr/>
+        <p:nvPr/>
+      </p:nvGrpSpPr>
+      <p:grpSpPr>
+        <a:xfrm>
+          <a:off x="0" y="0"/>
+          <a:ext cx="0" cy="0"/>
+          <a:chOff x="0" y="0"/>
+          <a:chExt cx="0" cy="0"/>
+        </a:xfrm>
+      </p:grpSpPr>
+      <p:sp>
+        <p:nvSpPr>
+          <p:cNvPr id="2" name="Slide Image Placeholder 1"/>
+          <p:cNvSpPr>
+            <a:spLocks noGrp="1" noRot="1" noChangeAspect="1"/>
+          </p:cNvSpPr>
+          <p:nvPr>
+            <p:ph type="sldImg"/>
+          </p:nvPr>
+        </p:nvSpPr>
+        <p:spPr/>
+      </p:sp>
+      <p:sp>
+        <p:nvSpPr>
+          <p:cNvPr id="3" name="Notes Placeholder 2"/>
+          <p:cNvSpPr>
+            <a:spLocks noGrp="1"/>
+          </p:cNvSpPr>
+          <p:nvPr>
+            <p:ph type="body" idx="1"/>
+          </p:nvPr>
+        </p:nvSpPr>
+        <p:spPr/>
+        <p:txBody>
+          <a:bodyPr/>
+          <a:lstStyle/>
+          <a:p>
+            <a:pPr>
+              <a:buNone/>
+            </a:pPr>
+            <a:r>
+              <a:rPr lang="en-SA" b="1" dirty="0"/>
+              <a:t>🧠 </a:t>
+            </a:r>
+            <a:r>
+              <a:rPr lang="en-US" b="1" dirty="0"/>
+              <a:t>Traditional ML Models</a:t>
+            </a:r>
+          </a:p>
+          <a:p>
+            <a:pPr>
+              <a:buFont typeface="Arial" panose="020B0604020202020204" pitchFamily="34" charset="0"/>
+              <a:buChar char="•"/>
+            </a:pPr>
+            <a:r>
+              <a:rPr lang="en-US" b="1" dirty="0"/>
+              <a:t>Kelley et al., 2016</a:t>
+            </a:r>
+            <a:r>
+              <a:rPr lang="en-US" dirty="0"/>
+              <a:t> – </a:t>
+            </a:r>
+            <a:r>
+              <a:rPr lang="en-US" i="1" dirty="0"/>
+              <a:t>Basset: Learning the regulatory code of the accessible genome with deep CNNs.</a:t>
+            </a:r>
+            <a:r>
+              <a:rPr lang="en-US" dirty="0"/>
+              <a:t> Genome Research.</a:t>
+            </a:r>
+          </a:p>
+          <a:p>
+            <a:pPr>
+              <a:buFont typeface="Arial" panose="020B0604020202020204" pitchFamily="34" charset="0"/>
+              <a:buChar char="•"/>
+            </a:pPr>
+            <a:r>
+              <a:rPr lang="en-US" b="1" dirty="0"/>
+              <a:t>Ghandi et al., 2014</a:t>
+            </a:r>
+            <a:r>
+              <a:rPr lang="en-US" dirty="0"/>
+              <a:t> – </a:t>
+            </a:r>
+            <a:r>
+              <a:rPr lang="en-US" i="1" dirty="0"/>
+              <a:t>Enhanced regulatory sequence prediction using gapped k-</a:t>
+            </a:r>
+            <a:r>
+              <a:rPr lang="en-US" i="1" dirty="0" err="1"/>
+              <a:t>mer</a:t>
+            </a:r>
+            <a:r>
+              <a:rPr lang="en-US" i="1" dirty="0"/>
+              <a:t> features.</a:t>
+            </a:r>
+            <a:r>
+              <a:rPr lang="en-US" dirty="0"/>
+              <a:t> </a:t>
+            </a:r>
+            <a:r>
+              <a:rPr lang="en-US" dirty="0" err="1"/>
+              <a:t>PLoS</a:t>
+            </a:r>
+            <a:r>
+              <a:rPr lang="en-US" dirty="0"/>
+              <a:t> </a:t>
+            </a:r>
+            <a:r>
+              <a:rPr lang="en-US" dirty="0" err="1"/>
+              <a:t>Comput</a:t>
+            </a:r>
+            <a:r>
+              <a:rPr lang="en-US" dirty="0"/>
+              <a:t> Biol.</a:t>
+            </a:r>
+          </a:p>
+          <a:p>
+            <a:pPr>
+              <a:buFont typeface="Arial" panose="020B0604020202020204" pitchFamily="34" charset="0"/>
+              <a:buChar char="•"/>
+            </a:pPr>
+            <a:r>
+              <a:rPr lang="en-US" b="1" dirty="0"/>
+              <a:t>Zhou &amp; </a:t>
+            </a:r>
+            <a:r>
+              <a:rPr lang="en-US" b="1" dirty="0" err="1"/>
+              <a:t>Troyanskaya</a:t>
+            </a:r>
+            <a:r>
+              <a:rPr lang="en-US" b="1" dirty="0"/>
+              <a:t>, 2015</a:t>
+            </a:r>
+            <a:r>
+              <a:rPr lang="en-US" dirty="0"/>
+              <a:t> – </a:t>
+            </a:r>
+            <a:r>
+              <a:rPr lang="en-US" i="1" dirty="0"/>
+              <a:t>Predicting effects of noncoding variants with deep learning-based sequence model.</a:t>
+            </a:r>
+            <a:r>
+              <a:rPr lang="en-US" dirty="0"/>
+              <a:t> Nature Methods.</a:t>
+            </a:r>
+          </a:p>
+          <a:p>
+            <a:pPr>
+              <a:buFont typeface="Arial" panose="020B0604020202020204" pitchFamily="34" charset="0"/>
+              <a:buChar char="•"/>
+            </a:pPr>
+            <a:r>
+              <a:rPr lang="en-US" b="1" dirty="0"/>
+              <a:t>Ernst &amp; Kellis, 2012</a:t>
+            </a:r>
+            <a:r>
+              <a:rPr lang="en-US" dirty="0"/>
+              <a:t> – </a:t>
+            </a:r>
+            <a:r>
+              <a:rPr lang="en-US" i="1" dirty="0" err="1"/>
+              <a:t>ChromHMM</a:t>
+            </a:r>
+            <a:r>
+              <a:rPr lang="en-US" i="1" dirty="0"/>
+              <a:t>: automating chromatin-state discovery and characterization.</a:t>
+            </a:r>
+            <a:r>
+              <a:rPr lang="en-US" dirty="0"/>
+              <a:t> Nature Methods.</a:t>
+            </a:r>
+          </a:p>
+          <a:p>
+            <a:pPr>
+              <a:buNone/>
+            </a:pPr>
+            <a:br>
+              <a:rPr lang="en-US" dirty="0"/>
+            </a:br>
+            <a:endParaRPr lang="en-US" dirty="0"/>
+          </a:p>
+          <a:p>
+            <a:pPr>
+              <a:buNone/>
+            </a:pPr>
+            <a:r>
+              <a:rPr lang="en-SA" b="1" dirty="0"/>
+              <a:t>🧬 </a:t>
+            </a:r>
+            <a:r>
+              <a:rPr lang="en-US" b="1" dirty="0"/>
+              <a:t>Foundation Models</a:t>
+            </a:r>
+          </a:p>
+          <a:p>
+            <a:pPr>
+              <a:buFont typeface="Arial" panose="020B0604020202020204" pitchFamily="34" charset="0"/>
+              <a:buChar char="•"/>
+            </a:pPr>
+            <a:r>
+              <a:rPr lang="en-US" b="1" dirty="0"/>
+              <a:t>Avsec et al., 2021</a:t>
+            </a:r>
+            <a:r>
+              <a:rPr lang="en-US" dirty="0"/>
+              <a:t> – </a:t>
+            </a:r>
+            <a:r>
+              <a:rPr lang="en-US" i="1" dirty="0"/>
+              <a:t>Effective gene expression prediction from sequence using </a:t>
+            </a:r>
+            <a:r>
+              <a:rPr lang="en-US" i="1" dirty="0" err="1"/>
+              <a:t>Enformer</a:t>
+            </a:r>
+            <a:r>
+              <a:rPr lang="en-US" i="1" dirty="0"/>
+              <a:t>.</a:t>
+            </a:r>
+            <a:r>
+              <a:rPr lang="en-US" dirty="0"/>
+              <a:t> Nature Methods.</a:t>
+            </a:r>
+          </a:p>
+          <a:p>
+            <a:pPr>
+              <a:buFont typeface="Arial" panose="020B0604020202020204" pitchFamily="34" charset="0"/>
+              <a:buChar char="•"/>
+            </a:pPr>
+            <a:r>
+              <a:rPr lang="en-US" b="1" dirty="0"/>
+              <a:t>Ji et al., 2021</a:t>
+            </a:r>
+            <a:r>
+              <a:rPr lang="en-US" dirty="0"/>
+              <a:t> – </a:t>
+            </a:r>
+            <a:r>
+              <a:rPr lang="en-US" i="1" dirty="0"/>
+              <a:t>DNABERT: pre-trained bidirectional encoder representations from transformers for DNA-language.</a:t>
+            </a:r>
+            <a:r>
+              <a:rPr lang="en-US" dirty="0"/>
+              <a:t> Bioinformatics.</a:t>
+            </a:r>
+          </a:p>
+          <a:p>
+            <a:pPr>
+              <a:buFont typeface="Arial" panose="020B0604020202020204" pitchFamily="34" charset="0"/>
+              <a:buChar char="•"/>
+            </a:pPr>
+            <a:r>
+              <a:rPr lang="en-US" b="1" dirty="0"/>
+              <a:t>Nijkamp et al., 2023</a:t>
+            </a:r>
+            <a:r>
+              <a:rPr lang="en-US" dirty="0"/>
+              <a:t> – </a:t>
+            </a:r>
+            <a:r>
+              <a:rPr lang="en-US" i="1" dirty="0"/>
+              <a:t>A survey of foundation models for protein and genomic sequences.</a:t>
+            </a:r>
+            <a:r>
+              <a:rPr lang="en-US" dirty="0"/>
+              <a:t> </a:t>
+            </a:r>
+            <a:r>
+              <a:rPr lang="en-US" dirty="0" err="1"/>
+              <a:t>arXiv</a:t>
+            </a:r>
+            <a:r>
+              <a:rPr lang="en-US" dirty="0"/>
+              <a:t>.</a:t>
+            </a:r>
+          </a:p>
+          <a:p>
+            <a:pPr>
+              <a:buFont typeface="Arial" panose="020B0604020202020204" pitchFamily="34" charset="0"/>
+              <a:buChar char="•"/>
+            </a:pPr>
+            <a:r>
+              <a:rPr lang="en-US" b="1" dirty="0" err="1"/>
+              <a:t>Ferruz</a:t>
+            </a:r>
+            <a:r>
+              <a:rPr lang="en-US" b="1" dirty="0"/>
+              <a:t> et al., 2023</a:t>
+            </a:r>
+            <a:r>
+              <a:rPr lang="en-US" dirty="0"/>
+              <a:t> – </a:t>
+            </a:r>
+            <a:r>
+              <a:rPr lang="en-US" i="1" dirty="0"/>
+              <a:t>Nucleotide Transformer: building and evaluating robust foundation models for human genomics.</a:t>
+            </a:r>
+            <a:endParaRPr lang="en-US" dirty="0"/>
+          </a:p>
+          <a:p>
+            <a:pPr>
+              <a:buFont typeface="Arial" panose="020B0604020202020204" pitchFamily="34" charset="0"/>
+              <a:buChar char="•"/>
+            </a:pPr>
+            <a:r>
+              <a:rPr lang="en-US" b="1" dirty="0"/>
+              <a:t>Zou et al., 2023</a:t>
+            </a:r>
+            <a:r>
+              <a:rPr lang="en-US" dirty="0"/>
+              <a:t> – </a:t>
+            </a:r>
+            <a:r>
+              <a:rPr lang="en-US" i="1" dirty="0"/>
+              <a:t>Toward species-generalizable genomic foundation models.</a:t>
+            </a:r>
+            <a:endParaRPr lang="en-US" dirty="0"/>
+          </a:p>
+          <a:p>
+            <a:pPr>
+              <a:buFont typeface="Arial" panose="020B0604020202020204" pitchFamily="34" charset="0"/>
+              <a:buChar char="•"/>
+            </a:pPr>
+            <a:r>
+              <a:rPr lang="en-US" b="1" dirty="0"/>
+              <a:t>Zhou et al., 2023</a:t>
+            </a:r>
+            <a:r>
+              <a:rPr lang="en-US" dirty="0"/>
+              <a:t> – </a:t>
+            </a:r>
+            <a:r>
+              <a:rPr lang="en-US" i="1" dirty="0"/>
+              <a:t>Biological insights from foundation models of regulatory genomics.</a:t>
+            </a:r>
+            <a:endParaRPr lang="en-US" dirty="0"/>
+          </a:p>
+          <a:p>
+            <a:endParaRPr lang="en-SA" dirty="0"/>
+          </a:p>
+        </p:txBody>
+      </p:sp>
+      <p:sp>
+        <p:nvSpPr>
+          <p:cNvPr id="4" name="Slide Number Placeholder 3"/>
+          <p:cNvSpPr>
+            <a:spLocks noGrp="1"/>
+          </p:cNvSpPr>
+          <p:nvPr>
+            <p:ph type="sldNum" sz="quarter" idx="5"/>
+          </p:nvPr>
+        </p:nvSpPr>
+        <p:spPr/>
+        <p:txBody>
+          <a:bodyPr/>
+          <a:lstStyle/>
+          <a:p>
+            <a:fld id="{77542409-6A04-4DC6-AC3A-D3758287A8F2}" type="slidenum">
+              <a:rPr lang="en-SA" smtClean="0"/>
+              <a:t>21</a:t>
+            </a:fld>
+            <a:endParaRPr lang="en-SA"/>
+          </a:p>
+        </p:txBody>
+      </p:sp>
+    </p:spTree>
+    <p:extLst>
+      <p:ext uri="{BB962C8B-B14F-4D97-AF65-F5344CB8AC3E}">
+        <p14:creationId xmlns:p14="http://schemas.microsoft.com/office/powerpoint/2010/main" val="2474412391"/>
+      </p:ext>
+    </p:extLst>
+  </p:cSld>
+  <p:clrMapOvr>
+    <a:masterClrMapping/>
+  </p:clrMapOvr>
+</p:notes>
+</file>
+
 <file path=ppt/notesSlides/notesSlide2.xml><?xml version="1.0" encoding="utf-8"?>
+<p:notes xmlns:a="http://schemas.openxmlformats.org/drawingml/2006/main" xmlns:r="http://schemas.openxmlformats.org/officeDocument/2006/relationships" xmlns:p="http://schemas.openxmlformats.org/presentationml/2006/main">
+  <p:cSld>
+    <p:spTree>
+      <p:nvGrpSpPr>
+        <p:cNvPr id="1" name=""/>
+        <p:cNvGrpSpPr/>
+        <p:nvPr/>
+      </p:nvGrpSpPr>
+      <p:grpSpPr>
+        <a:xfrm>
+          <a:off x="0" y="0"/>
+          <a:ext cx="0" cy="0"/>
+          <a:chOff x="0" y="0"/>
+          <a:chExt cx="0" cy="0"/>
+        </a:xfrm>
+      </p:grpSpPr>
+      <p:sp>
+        <p:nvSpPr>
+          <p:cNvPr id="2" name="Slide Image Placeholder 1"/>
+          <p:cNvSpPr>
+            <a:spLocks noGrp="1" noRot="1" noChangeAspect="1"/>
+          </p:cNvSpPr>
+          <p:nvPr>
+            <p:ph type="sldImg"/>
+          </p:nvPr>
+        </p:nvSpPr>
+        <p:spPr/>
+      </p:sp>
+      <p:sp>
+        <p:nvSpPr>
+          <p:cNvPr id="3" name="Notes Placeholder 2"/>
+          <p:cNvSpPr>
+            <a:spLocks noGrp="1"/>
+          </p:cNvSpPr>
+          <p:nvPr>
+            <p:ph type="body" idx="1"/>
+          </p:nvPr>
+        </p:nvSpPr>
+        <p:spPr/>
+        <p:txBody>
+          <a:bodyPr/>
+          <a:lstStyle/>
+          <a:p>
+            <a:r>
+              <a:rPr lang="en-SA" dirty="0"/>
+              <a:t>Inductive bias -&gt; locality, </a:t>
+            </a:r>
+            <a:r>
+              <a:rPr lang="en-US" dirty="0"/>
+              <a:t>Translation equivariance, hierarchical composition</a:t>
+            </a:r>
+            <a:endParaRPr lang="en-SA" dirty="0"/>
+          </a:p>
+        </p:txBody>
+      </p:sp>
+      <p:sp>
+        <p:nvSpPr>
+          <p:cNvPr id="4" name="Slide Number Placeholder 3"/>
+          <p:cNvSpPr>
+            <a:spLocks noGrp="1"/>
+          </p:cNvSpPr>
+          <p:nvPr>
+            <p:ph type="sldNum" sz="quarter" idx="5"/>
+          </p:nvPr>
+        </p:nvSpPr>
+        <p:spPr/>
+        <p:txBody>
+          <a:bodyPr/>
+          <a:lstStyle/>
+          <a:p>
+            <a:fld id="{77542409-6A04-4DC6-AC3A-D3758287A8F2}" type="slidenum">
+              <a:rPr lang="en-SA" smtClean="0"/>
+              <a:t>3</a:t>
+            </a:fld>
+            <a:endParaRPr lang="en-SA"/>
+          </a:p>
+        </p:txBody>
+      </p:sp>
+    </p:spTree>
+    <p:extLst>
+      <p:ext uri="{BB962C8B-B14F-4D97-AF65-F5344CB8AC3E}">
+        <p14:creationId xmlns:p14="http://schemas.microsoft.com/office/powerpoint/2010/main" val="1569818784"/>
+      </p:ext>
+    </p:extLst>
+  </p:cSld>
+  <p:clrMapOvr>
+    <a:masterClrMapping/>
+  </p:clrMapOvr>
+</p:notes>
+</file>
+
+<file path=ppt/notesSlides/notesSlide3.xml><?xml version="1.0" encoding="utf-8"?>
+<p:notes xmlns:a="http://schemas.openxmlformats.org/drawingml/2006/main" xmlns:r="http://schemas.openxmlformats.org/officeDocument/2006/relationships" xmlns:p="http://schemas.openxmlformats.org/presentationml/2006/main">
+  <p:cSld>
+    <p:spTree>
+      <p:nvGrpSpPr>
+        <p:cNvPr id="1" name=""/>
+        <p:cNvGrpSpPr/>
+        <p:nvPr/>
+      </p:nvGrpSpPr>
+      <p:grpSpPr>
+        <a:xfrm>
+          <a:off x="0" y="0"/>
+          <a:ext cx="0" cy="0"/>
+          <a:chOff x="0" y="0"/>
+          <a:chExt cx="0" cy="0"/>
+        </a:xfrm>
+      </p:grpSpPr>
+      <p:sp>
+        <p:nvSpPr>
+          <p:cNvPr id="2" name="Slide Image Placeholder 1"/>
+          <p:cNvSpPr>
+            <a:spLocks noGrp="1" noRot="1" noChangeAspect="1"/>
+          </p:cNvSpPr>
+          <p:nvPr>
+            <p:ph type="sldImg"/>
+          </p:nvPr>
+        </p:nvSpPr>
+        <p:spPr/>
+      </p:sp>
+      <p:sp>
+        <p:nvSpPr>
+          <p:cNvPr id="3" name="Notes Placeholder 2"/>
+          <p:cNvSpPr>
+            <a:spLocks noGrp="1"/>
+          </p:cNvSpPr>
+          <p:nvPr>
+            <p:ph type="body" idx="1"/>
+          </p:nvPr>
+        </p:nvSpPr>
+        <p:spPr/>
+        <p:txBody>
+          <a:bodyPr/>
+          <a:lstStyle/>
+          <a:p>
+            <a:r>
+              <a:rPr lang="en-US" dirty="0"/>
+              <a:t>DPO (Direct Preference Optimization) is a method for aligning large language models with human preferences without using reinforcement learning (RL)</a:t>
+            </a:r>
+            <a:endParaRPr lang="en-SA" dirty="0"/>
+          </a:p>
+        </p:txBody>
+      </p:sp>
+      <p:sp>
+        <p:nvSpPr>
+          <p:cNvPr id="4" name="Slide Number Placeholder 3"/>
+          <p:cNvSpPr>
+            <a:spLocks noGrp="1"/>
+          </p:cNvSpPr>
+          <p:nvPr>
+            <p:ph type="sldNum" sz="quarter" idx="5"/>
+          </p:nvPr>
+        </p:nvSpPr>
+        <p:spPr/>
+        <p:txBody>
+          <a:bodyPr/>
+          <a:lstStyle/>
+          <a:p>
+            <a:fld id="{77542409-6A04-4DC6-AC3A-D3758287A8F2}" type="slidenum">
+              <a:rPr lang="en-SA" smtClean="0"/>
+              <a:t>4</a:t>
+            </a:fld>
+            <a:endParaRPr lang="en-SA"/>
+          </a:p>
+        </p:txBody>
+      </p:sp>
+    </p:spTree>
+    <p:extLst>
+      <p:ext uri="{BB962C8B-B14F-4D97-AF65-F5344CB8AC3E}">
+        <p14:creationId xmlns:p14="http://schemas.microsoft.com/office/powerpoint/2010/main" val="3573034164"/>
+      </p:ext>
+    </p:extLst>
+  </p:cSld>
+  <p:clrMapOvr>
+    <a:masterClrMapping/>
+  </p:clrMapOvr>
+</p:notes>
+</file>
+
+<file path=ppt/notesSlides/notesSlide4.xml><?xml version="1.0" encoding="utf-8"?>
 <p:notes xmlns:a="http://schemas.openxmlformats.org/drawingml/2006/main" xmlns:r="http://schemas.openxmlformats.org/officeDocument/2006/relationships" xmlns:p="http://schemas.openxmlformats.org/presentationml/2006/main">
   <p:cSld>
     <p:spTree>
@@ -13415,271 +13981,6 @@
 </p:notes>
 </file>
 
-<file path=ppt/notesSlides/notesSlide3.xml><?xml version="1.0" encoding="utf-8"?>
-<p:notes xmlns:a="http://schemas.openxmlformats.org/drawingml/2006/main" xmlns:r="http://schemas.openxmlformats.org/officeDocument/2006/relationships" xmlns:p="http://schemas.openxmlformats.org/presentationml/2006/main">
-  <p:cSld>
-    <p:spTree>
-      <p:nvGrpSpPr>
-        <p:cNvPr id="1" name=""/>
-        <p:cNvGrpSpPr/>
-        <p:nvPr/>
-      </p:nvGrpSpPr>
-      <p:grpSpPr>
-        <a:xfrm>
-          <a:off x="0" y="0"/>
-          <a:ext cx="0" cy="0"/>
-          <a:chOff x="0" y="0"/>
-          <a:chExt cx="0" cy="0"/>
-        </a:xfrm>
-      </p:grpSpPr>
-      <p:sp>
-        <p:nvSpPr>
-          <p:cNvPr id="2" name="Slide Image Placeholder 1"/>
-          <p:cNvSpPr>
-            <a:spLocks noGrp="1" noRot="1" noChangeAspect="1"/>
-          </p:cNvSpPr>
-          <p:nvPr>
-            <p:ph type="sldImg"/>
-          </p:nvPr>
-        </p:nvSpPr>
-        <p:spPr/>
-      </p:sp>
-      <p:sp>
-        <p:nvSpPr>
-          <p:cNvPr id="3" name="Notes Placeholder 2"/>
-          <p:cNvSpPr>
-            <a:spLocks noGrp="1"/>
-          </p:cNvSpPr>
-          <p:nvPr>
-            <p:ph type="body" idx="1"/>
-          </p:nvPr>
-        </p:nvSpPr>
-        <p:spPr/>
-        <p:txBody>
-          <a:bodyPr/>
-          <a:lstStyle/>
-          <a:p>
-            <a:pPr marL="0" marR="0" lvl="0" indent="0" algn="l" defTabSz="914400" rtl="0" eaLnBrk="1" fontAlgn="auto" latinLnBrk="0" hangingPunct="1">
-              <a:lnSpc>
-                <a:spcPct val="100000"/>
-              </a:lnSpc>
-              <a:spcBef>
-                <a:spcPts val="0"/>
-              </a:spcBef>
-              <a:spcAft>
-                <a:spcPts val="0"/>
-              </a:spcAft>
-              <a:buClrTx/>
-              <a:buSzTx/>
-              <a:buFontTx/>
-              <a:buNone/>
-              <a:tabLst/>
-              <a:defRPr/>
-            </a:pPr>
-            <a:r>
-              <a:rPr lang="en-US" dirty="0"/>
-              <a:t>TFs don’t bind to a single exact DNA sequence—they bind to </a:t>
-            </a:r>
-            <a:r>
-              <a:rPr lang="en-US" b="1" dirty="0"/>
-              <a:t>families of similar sequences</a:t>
-            </a:r>
-            <a:r>
-              <a:rPr lang="en-US" dirty="0"/>
-              <a:t>. A PWM captures this variability and helps </a:t>
-            </a:r>
-            <a:r>
-              <a:rPr lang="en-US" b="1" dirty="0"/>
-              <a:t>score new sequences</a:t>
-            </a:r>
-            <a:r>
-              <a:rPr lang="en-US" dirty="0"/>
-              <a:t> based on how well they match the known motif.</a:t>
-            </a:r>
-          </a:p>
-          <a:p>
-            <a:endParaRPr lang="en-SA" dirty="0"/>
-          </a:p>
-        </p:txBody>
-      </p:sp>
-      <p:sp>
-        <p:nvSpPr>
-          <p:cNvPr id="4" name="Slide Number Placeholder 3"/>
-          <p:cNvSpPr>
-            <a:spLocks noGrp="1"/>
-          </p:cNvSpPr>
-          <p:nvPr>
-            <p:ph type="sldNum" sz="quarter" idx="5"/>
-          </p:nvPr>
-        </p:nvSpPr>
-        <p:spPr/>
-        <p:txBody>
-          <a:bodyPr/>
-          <a:lstStyle/>
-          <a:p>
-            <a:fld id="{77542409-6A04-4DC6-AC3A-D3758287A8F2}" type="slidenum">
-              <a:rPr lang="en-SA" smtClean="0"/>
-              <a:t>10</a:t>
-            </a:fld>
-            <a:endParaRPr lang="en-SA"/>
-          </a:p>
-        </p:txBody>
-      </p:sp>
-    </p:spTree>
-    <p:extLst>
-      <p:ext uri="{BB962C8B-B14F-4D97-AF65-F5344CB8AC3E}">
-        <p14:creationId xmlns:p14="http://schemas.microsoft.com/office/powerpoint/2010/main" val="2744541816"/>
-      </p:ext>
-    </p:extLst>
-  </p:cSld>
-  <p:clrMapOvr>
-    <a:masterClrMapping/>
-  </p:clrMapOvr>
-</p:notes>
-</file>
-
-<file path=ppt/notesSlides/notesSlide4.xml><?xml version="1.0" encoding="utf-8"?>
-<p:notes xmlns:a="http://schemas.openxmlformats.org/drawingml/2006/main" xmlns:r="http://schemas.openxmlformats.org/officeDocument/2006/relationships" xmlns:p="http://schemas.openxmlformats.org/presentationml/2006/main">
-  <p:cSld>
-    <p:spTree>
-      <p:nvGrpSpPr>
-        <p:cNvPr id="1" name=""/>
-        <p:cNvGrpSpPr/>
-        <p:nvPr/>
-      </p:nvGrpSpPr>
-      <p:grpSpPr>
-        <a:xfrm>
-          <a:off x="0" y="0"/>
-          <a:ext cx="0" cy="0"/>
-          <a:chOff x="0" y="0"/>
-          <a:chExt cx="0" cy="0"/>
-        </a:xfrm>
-      </p:grpSpPr>
-      <p:sp>
-        <p:nvSpPr>
-          <p:cNvPr id="2" name="Slide Image Placeholder 1"/>
-          <p:cNvSpPr>
-            <a:spLocks noGrp="1" noRot="1" noChangeAspect="1"/>
-          </p:cNvSpPr>
-          <p:nvPr>
-            <p:ph type="sldImg"/>
-          </p:nvPr>
-        </p:nvSpPr>
-        <p:spPr/>
-      </p:sp>
-      <p:sp>
-        <p:nvSpPr>
-          <p:cNvPr id="3" name="Notes Placeholder 2"/>
-          <p:cNvSpPr>
-            <a:spLocks noGrp="1"/>
-          </p:cNvSpPr>
-          <p:nvPr>
-            <p:ph type="body" idx="1"/>
-          </p:nvPr>
-        </p:nvSpPr>
-        <p:spPr/>
-        <p:txBody>
-          <a:bodyPr/>
-          <a:lstStyle/>
-          <a:p>
-            <a:pPr marL="0" marR="0" lvl="0" indent="0" algn="l" defTabSz="914400" rtl="0" eaLnBrk="1" fontAlgn="auto" latinLnBrk="0" hangingPunct="1">
-              <a:lnSpc>
-                <a:spcPct val="100000"/>
-              </a:lnSpc>
-              <a:spcBef>
-                <a:spcPts val="0"/>
-              </a:spcBef>
-              <a:spcAft>
-                <a:spcPts val="0"/>
-              </a:spcAft>
-              <a:buClrTx/>
-              <a:buSzTx/>
-              <a:buFontTx/>
-              <a:buNone/>
-              <a:tabLst/>
-              <a:defRPr/>
-            </a:pPr>
-            <a:r>
-              <a:rPr lang="en-US" b="1" i="0" dirty="0">
-                <a:solidFill>
-                  <a:srgbClr val="333333"/>
-                </a:solidFill>
-                <a:effectLst/>
-                <a:latin typeface="Segoe UI" panose="020B0502040204020203" pitchFamily="34" charset="0"/>
-              </a:rPr>
-              <a:t>Answer: C. They learn rich representations transferable to multiple tasks</a:t>
-            </a:r>
-          </a:p>
-          <a:p>
-            <a:pPr marL="0" marR="0" lvl="0" indent="0" algn="l" defTabSz="914400" rtl="0" eaLnBrk="1" fontAlgn="auto" latinLnBrk="0" hangingPunct="1">
-              <a:lnSpc>
-                <a:spcPct val="100000"/>
-              </a:lnSpc>
-              <a:spcBef>
-                <a:spcPts val="0"/>
-              </a:spcBef>
-              <a:spcAft>
-                <a:spcPts val="0"/>
-              </a:spcAft>
-              <a:buClrTx/>
-              <a:buSzTx/>
-              <a:buFontTx/>
-              <a:buNone/>
-              <a:tabLst/>
-              <a:defRPr/>
-            </a:pPr>
-            <a:r>
-              <a:rPr lang="en-US" b="0" i="0" dirty="0">
-                <a:solidFill>
-                  <a:srgbClr val="333333"/>
-                </a:solidFill>
-                <a:effectLst/>
-                <a:latin typeface="Segoe UI" panose="020B0502040204020203" pitchFamily="34" charset="0"/>
-              </a:rPr>
-              <a:t>Foundation models learn generalizable representations from large amounts of data that can be efficiently adapted to multiple downstream tasks through fine-tuning, reducing the need for task-specific data collection and annotation.</a:t>
-            </a:r>
-          </a:p>
-          <a:p>
-            <a:endParaRPr lang="en-SA" dirty="0"/>
-          </a:p>
-        </p:txBody>
-      </p:sp>
-      <p:sp>
-        <p:nvSpPr>
-          <p:cNvPr id="4" name="Slide Number Placeholder 3"/>
-          <p:cNvSpPr>
-            <a:spLocks noGrp="1"/>
-          </p:cNvSpPr>
-          <p:nvPr>
-            <p:ph type="sldNum" sz="quarter" idx="5"/>
-          </p:nvPr>
-        </p:nvSpPr>
-        <p:spPr/>
-        <p:txBody>
-          <a:bodyPr/>
-          <a:lstStyle/>
-          <a:p>
-            <a:fld id="{77542409-6A04-4DC6-AC3A-D3758287A8F2}" type="slidenum">
-              <a:rPr lang="en-SA" smtClean="0"/>
-              <a:t>15</a:t>
-            </a:fld>
-            <a:endParaRPr lang="en-SA"/>
-          </a:p>
-        </p:txBody>
-      </p:sp>
-    </p:spTree>
-    <p:extLst>
-      <p:ext uri="{BB962C8B-B14F-4D97-AF65-F5344CB8AC3E}">
-        <p14:creationId xmlns:p14="http://schemas.microsoft.com/office/powerpoint/2010/main" val="3424166180"/>
-      </p:ext>
-    </p:extLst>
-  </p:cSld>
-  <p:clrMapOvr>
-    <a:masterClrMapping/>
-  </p:clrMapOvr>
-</p:notes>
-</file>
-
 <file path=ppt/notesSlides/notesSlide5.xml><?xml version="1.0" encoding="utf-8"?>
 <p:notes xmlns:a="http://schemas.openxmlformats.org/drawingml/2006/main" xmlns:r="http://schemas.openxmlformats.org/officeDocument/2006/relationships" xmlns:p="http://schemas.openxmlformats.org/presentationml/2006/main">
   <p:cSld>
@@ -13742,30 +14043,27 @@
               <a:defRPr/>
             </a:pPr>
             <a:r>
+              <a:rPr lang="en-US" dirty="0"/>
+              <a:t>TFs don’t bind to a single exact DNA sequence—they bind to </a:t>
+            </a:r>
+            <a:r>
               <a:rPr lang="en-US" b="1" dirty="0"/>
-              <a:t>Off-label practice</a:t>
+              <a:t>families of similar sequences</a:t>
             </a:r>
             <a:r>
               <a:rPr lang="en-US" dirty="0"/>
-              <a:t> means doctors sometimes use drugs to treat conditions they weren’t originally approved for, based on their experience or new evidence.</a:t>
-            </a:r>
-          </a:p>
-          <a:p>
-            <a:endParaRPr lang="en-SA" dirty="0"/>
-          </a:p>
-          <a:p>
+              <a:t>. A PWM captures this variability and helps </a:t>
+            </a:r>
+            <a:r>
+              <a:rPr lang="en-US" b="1" dirty="0"/>
+              <a:t>score new sequences</a:t>
+            </a:r>
             <a:r>
               <a:rPr lang="en-US" dirty="0"/>
-              <a:t>Check link for more examples https://</a:t>
-            </a:r>
-            <a:r>
-              <a:rPr lang="en-US" dirty="0" err="1"/>
-              <a:t>watershed.bio</a:t>
-            </a:r>
-            <a:r>
-              <a:rPr lang="en-US" dirty="0"/>
-              <a:t>/resources/foundation-models-for-biomedical-research</a:t>
-            </a:r>
+              <a:t> based on how well they match the known motif.</a:t>
+            </a:r>
+          </a:p>
+          <a:p>
             <a:endParaRPr lang="en-SA" dirty="0"/>
           </a:p>
         </p:txBody>
@@ -13787,6 +14085,430 @@
           <a:p>
             <a:fld id="{77542409-6A04-4DC6-AC3A-D3758287A8F2}" type="slidenum">
               <a:rPr lang="en-SA" smtClean="0"/>
+              <a:t>10</a:t>
+            </a:fld>
+            <a:endParaRPr lang="en-SA"/>
+          </a:p>
+        </p:txBody>
+      </p:sp>
+    </p:spTree>
+    <p:extLst>
+      <p:ext uri="{BB962C8B-B14F-4D97-AF65-F5344CB8AC3E}">
+        <p14:creationId xmlns:p14="http://schemas.microsoft.com/office/powerpoint/2010/main" val="2744541816"/>
+      </p:ext>
+    </p:extLst>
+  </p:cSld>
+  <p:clrMapOvr>
+    <a:masterClrMapping/>
+  </p:clrMapOvr>
+</p:notes>
+</file>
+
+<file path=ppt/notesSlides/notesSlide6.xml><?xml version="1.0" encoding="utf-8"?>
+<p:notes xmlns:a="http://schemas.openxmlformats.org/drawingml/2006/main" xmlns:r="http://schemas.openxmlformats.org/officeDocument/2006/relationships" xmlns:p="http://schemas.openxmlformats.org/presentationml/2006/main">
+  <p:cSld>
+    <p:spTree>
+      <p:nvGrpSpPr>
+        <p:cNvPr id="1" name=""/>
+        <p:cNvGrpSpPr/>
+        <p:nvPr/>
+      </p:nvGrpSpPr>
+      <p:grpSpPr>
+        <a:xfrm>
+          <a:off x="0" y="0"/>
+          <a:ext cx="0" cy="0"/>
+          <a:chOff x="0" y="0"/>
+          <a:chExt cx="0" cy="0"/>
+        </a:xfrm>
+      </p:grpSpPr>
+      <p:sp>
+        <p:nvSpPr>
+          <p:cNvPr id="2" name="Slide Image Placeholder 1"/>
+          <p:cNvSpPr>
+            <a:spLocks noGrp="1" noRot="1" noChangeAspect="1"/>
+          </p:cNvSpPr>
+          <p:nvPr>
+            <p:ph type="sldImg"/>
+          </p:nvPr>
+        </p:nvSpPr>
+        <p:spPr/>
+      </p:sp>
+      <p:sp>
+        <p:nvSpPr>
+          <p:cNvPr id="3" name="Notes Placeholder 2"/>
+          <p:cNvSpPr>
+            <a:spLocks noGrp="1"/>
+          </p:cNvSpPr>
+          <p:nvPr>
+            <p:ph type="body" idx="1"/>
+          </p:nvPr>
+        </p:nvSpPr>
+        <p:spPr/>
+        <p:txBody>
+          <a:bodyPr/>
+          <a:lstStyle/>
+          <a:p>
+            <a:r>
+              <a:rPr lang="en-US" sz="1200" b="0" i="0" kern="1200" dirty="0">
+                <a:solidFill>
+                  <a:schemeClr val="tx1"/>
+                </a:solidFill>
+                <a:effectLst/>
+                <a:latin typeface="+mn-lt"/>
+                <a:ea typeface="+mn-ea"/>
+                <a:cs typeface="+mn-cs"/>
+              </a:rPr>
+              <a:t>A CNN trained on human liver enhancers (e.g., </a:t>
+            </a:r>
+            <a:r>
+              <a:rPr lang="en-US" sz="1200" b="0" i="0" kern="1200" dirty="0" err="1">
+                <a:solidFill>
+                  <a:schemeClr val="tx1"/>
+                </a:solidFill>
+                <a:effectLst/>
+                <a:latin typeface="+mn-lt"/>
+                <a:ea typeface="+mn-ea"/>
+                <a:cs typeface="+mn-cs"/>
+              </a:rPr>
+              <a:t>DeepSEA</a:t>
+            </a:r>
+            <a:r>
+              <a:rPr lang="en-US" sz="1200" b="0" i="0" kern="1200" dirty="0">
+                <a:solidFill>
+                  <a:schemeClr val="tx1"/>
+                </a:solidFill>
+                <a:effectLst/>
+                <a:latin typeface="+mn-lt"/>
+                <a:ea typeface="+mn-ea"/>
+                <a:cs typeface="+mn-cs"/>
+              </a:rPr>
+              <a:t>) typically fails on mouse brain enhancers without retraining because it overfits to species-specific background biases</a:t>
+            </a:r>
+          </a:p>
+          <a:p>
+            <a:r>
+              <a:rPr lang="en-US" b="1" dirty="0"/>
+              <a:t>Bias:</a:t>
+            </a:r>
+            <a:r>
+              <a:rPr lang="en-US" dirty="0"/>
+              <a:t> Error due to overly simple assumptions (may miss some patterns).</a:t>
+            </a:r>
+          </a:p>
+          <a:p>
+            <a:r>
+              <a:rPr lang="en-US" b="1" dirty="0"/>
+              <a:t>Variance:</a:t>
+            </a:r>
+            <a:r>
+              <a:rPr lang="en-US" dirty="0"/>
+              <a:t> Error due to sensitivity to the specific training data (may overfit).</a:t>
+            </a:r>
+          </a:p>
+          <a:p>
+            <a:r>
+              <a:rPr lang="en-US" dirty="0"/>
+              <a:t>So, </a:t>
+            </a:r>
+            <a:r>
+              <a:rPr lang="en-US" b="1" dirty="0"/>
+              <a:t>small, narrow datasets favor models with lower variance</a:t>
+            </a:r>
+            <a:r>
+              <a:rPr lang="en-US" dirty="0"/>
+              <a:t>, which is why traditional ML sometimes beats GFMs in such cases.</a:t>
+            </a:r>
+          </a:p>
+          <a:p>
+            <a:endParaRPr lang="en-SA" dirty="0"/>
+          </a:p>
+        </p:txBody>
+      </p:sp>
+      <p:sp>
+        <p:nvSpPr>
+          <p:cNvPr id="4" name="Slide Number Placeholder 3"/>
+          <p:cNvSpPr>
+            <a:spLocks noGrp="1"/>
+          </p:cNvSpPr>
+          <p:nvPr>
+            <p:ph type="sldNum" sz="quarter" idx="5"/>
+          </p:nvPr>
+        </p:nvSpPr>
+        <p:spPr/>
+        <p:txBody>
+          <a:bodyPr/>
+          <a:lstStyle/>
+          <a:p>
+            <a:fld id="{77542409-6A04-4DC6-AC3A-D3758287A8F2}" type="slidenum">
+              <a:rPr lang="en-SA" smtClean="0"/>
+              <a:t>13</a:t>
+            </a:fld>
+            <a:endParaRPr lang="en-SA"/>
+          </a:p>
+        </p:txBody>
+      </p:sp>
+    </p:spTree>
+    <p:extLst>
+      <p:ext uri="{BB962C8B-B14F-4D97-AF65-F5344CB8AC3E}">
+        <p14:creationId xmlns:p14="http://schemas.microsoft.com/office/powerpoint/2010/main" val="460764615"/>
+      </p:ext>
+    </p:extLst>
+  </p:cSld>
+  <p:clrMapOvr>
+    <a:masterClrMapping/>
+  </p:clrMapOvr>
+</p:notes>
+</file>
+
+<file path=ppt/notesSlides/notesSlide7.xml><?xml version="1.0" encoding="utf-8"?>
+<p:notes xmlns:a="http://schemas.openxmlformats.org/drawingml/2006/main" xmlns:r="http://schemas.openxmlformats.org/officeDocument/2006/relationships" xmlns:p="http://schemas.openxmlformats.org/presentationml/2006/main">
+  <p:cSld>
+    <p:spTree>
+      <p:nvGrpSpPr>
+        <p:cNvPr id="1" name=""/>
+        <p:cNvGrpSpPr/>
+        <p:nvPr/>
+      </p:nvGrpSpPr>
+      <p:grpSpPr>
+        <a:xfrm>
+          <a:off x="0" y="0"/>
+          <a:ext cx="0" cy="0"/>
+          <a:chOff x="0" y="0"/>
+          <a:chExt cx="0" cy="0"/>
+        </a:xfrm>
+      </p:grpSpPr>
+      <p:sp>
+        <p:nvSpPr>
+          <p:cNvPr id="2" name="Slide Image Placeholder 1"/>
+          <p:cNvSpPr>
+            <a:spLocks noGrp="1" noRot="1" noChangeAspect="1"/>
+          </p:cNvSpPr>
+          <p:nvPr>
+            <p:ph type="sldImg"/>
+          </p:nvPr>
+        </p:nvSpPr>
+        <p:spPr/>
+      </p:sp>
+      <p:sp>
+        <p:nvSpPr>
+          <p:cNvPr id="3" name="Notes Placeholder 2"/>
+          <p:cNvSpPr>
+            <a:spLocks noGrp="1"/>
+          </p:cNvSpPr>
+          <p:nvPr>
+            <p:ph type="body" idx="1"/>
+          </p:nvPr>
+        </p:nvSpPr>
+        <p:spPr/>
+        <p:txBody>
+          <a:bodyPr/>
+          <a:lstStyle/>
+          <a:p>
+            <a:pPr marL="0" marR="0" lvl="0" indent="0" algn="l" defTabSz="914400" rtl="0" eaLnBrk="1" fontAlgn="auto" latinLnBrk="0" hangingPunct="1">
+              <a:lnSpc>
+                <a:spcPct val="100000"/>
+              </a:lnSpc>
+              <a:spcBef>
+                <a:spcPts val="0"/>
+              </a:spcBef>
+              <a:spcAft>
+                <a:spcPts val="0"/>
+              </a:spcAft>
+              <a:buClrTx/>
+              <a:buSzTx/>
+              <a:buFontTx/>
+              <a:buNone/>
+              <a:tabLst/>
+              <a:defRPr/>
+            </a:pPr>
+            <a:r>
+              <a:rPr lang="en-US" b="1" i="0" dirty="0">
+                <a:solidFill>
+                  <a:srgbClr val="333333"/>
+                </a:solidFill>
+                <a:effectLst/>
+                <a:latin typeface="Segoe UI" panose="020B0502040204020203" pitchFamily="34" charset="0"/>
+              </a:rPr>
+              <a:t>Answer: C. They learn rich representations transferable to multiple tasks</a:t>
+            </a:r>
+          </a:p>
+          <a:p>
+            <a:pPr marL="0" marR="0" lvl="0" indent="0" algn="l" defTabSz="914400" rtl="0" eaLnBrk="1" fontAlgn="auto" latinLnBrk="0" hangingPunct="1">
+              <a:lnSpc>
+                <a:spcPct val="100000"/>
+              </a:lnSpc>
+              <a:spcBef>
+                <a:spcPts val="0"/>
+              </a:spcBef>
+              <a:spcAft>
+                <a:spcPts val="0"/>
+              </a:spcAft>
+              <a:buClrTx/>
+              <a:buSzTx/>
+              <a:buFontTx/>
+              <a:buNone/>
+              <a:tabLst/>
+              <a:defRPr/>
+            </a:pPr>
+            <a:r>
+              <a:rPr lang="en-US" b="0" i="0" dirty="0">
+                <a:solidFill>
+                  <a:srgbClr val="333333"/>
+                </a:solidFill>
+                <a:effectLst/>
+                <a:latin typeface="Segoe UI" panose="020B0502040204020203" pitchFamily="34" charset="0"/>
+              </a:rPr>
+              <a:t>Foundation models learn generalizable representations from large amounts of data that can be efficiently adapted to multiple downstream tasks through fine-tuning, reducing the need for task-specific data collection and annotation.</a:t>
+            </a:r>
+          </a:p>
+          <a:p>
+            <a:endParaRPr lang="en-SA" dirty="0"/>
+          </a:p>
+        </p:txBody>
+      </p:sp>
+      <p:sp>
+        <p:nvSpPr>
+          <p:cNvPr id="4" name="Slide Number Placeholder 3"/>
+          <p:cNvSpPr>
+            <a:spLocks noGrp="1"/>
+          </p:cNvSpPr>
+          <p:nvPr>
+            <p:ph type="sldNum" sz="quarter" idx="5"/>
+          </p:nvPr>
+        </p:nvSpPr>
+        <p:spPr/>
+        <p:txBody>
+          <a:bodyPr/>
+          <a:lstStyle/>
+          <a:p>
+            <a:fld id="{77542409-6A04-4DC6-AC3A-D3758287A8F2}" type="slidenum">
+              <a:rPr lang="en-SA" smtClean="0"/>
+              <a:t>15</a:t>
+            </a:fld>
+            <a:endParaRPr lang="en-SA"/>
+          </a:p>
+        </p:txBody>
+      </p:sp>
+    </p:spTree>
+    <p:extLst>
+      <p:ext uri="{BB962C8B-B14F-4D97-AF65-F5344CB8AC3E}">
+        <p14:creationId xmlns:p14="http://schemas.microsoft.com/office/powerpoint/2010/main" val="3424166180"/>
+      </p:ext>
+    </p:extLst>
+  </p:cSld>
+  <p:clrMapOvr>
+    <a:masterClrMapping/>
+  </p:clrMapOvr>
+</p:notes>
+</file>
+
+<file path=ppt/notesSlides/notesSlide8.xml><?xml version="1.0" encoding="utf-8"?>
+<p:notes xmlns:a="http://schemas.openxmlformats.org/drawingml/2006/main" xmlns:r="http://schemas.openxmlformats.org/officeDocument/2006/relationships" xmlns:p="http://schemas.openxmlformats.org/presentationml/2006/main">
+  <p:cSld>
+    <p:spTree>
+      <p:nvGrpSpPr>
+        <p:cNvPr id="1" name=""/>
+        <p:cNvGrpSpPr/>
+        <p:nvPr/>
+      </p:nvGrpSpPr>
+      <p:grpSpPr>
+        <a:xfrm>
+          <a:off x="0" y="0"/>
+          <a:ext cx="0" cy="0"/>
+          <a:chOff x="0" y="0"/>
+          <a:chExt cx="0" cy="0"/>
+        </a:xfrm>
+      </p:grpSpPr>
+      <p:sp>
+        <p:nvSpPr>
+          <p:cNvPr id="2" name="Slide Image Placeholder 1"/>
+          <p:cNvSpPr>
+            <a:spLocks noGrp="1" noRot="1" noChangeAspect="1"/>
+          </p:cNvSpPr>
+          <p:nvPr>
+            <p:ph type="sldImg"/>
+          </p:nvPr>
+        </p:nvSpPr>
+        <p:spPr/>
+      </p:sp>
+      <p:sp>
+        <p:nvSpPr>
+          <p:cNvPr id="3" name="Notes Placeholder 2"/>
+          <p:cNvSpPr>
+            <a:spLocks noGrp="1"/>
+          </p:cNvSpPr>
+          <p:nvPr>
+            <p:ph type="body" idx="1"/>
+          </p:nvPr>
+        </p:nvSpPr>
+        <p:spPr/>
+        <p:txBody>
+          <a:bodyPr/>
+          <a:lstStyle/>
+          <a:p>
+            <a:pPr marL="0" marR="0" lvl="0" indent="0" algn="l" defTabSz="914400" rtl="0" eaLnBrk="1" fontAlgn="auto" latinLnBrk="0" hangingPunct="1">
+              <a:lnSpc>
+                <a:spcPct val="100000"/>
+              </a:lnSpc>
+              <a:spcBef>
+                <a:spcPts val="0"/>
+              </a:spcBef>
+              <a:spcAft>
+                <a:spcPts val="0"/>
+              </a:spcAft>
+              <a:buClrTx/>
+              <a:buSzTx/>
+              <a:buFontTx/>
+              <a:buNone/>
+              <a:tabLst/>
+              <a:defRPr/>
+            </a:pPr>
+            <a:r>
+              <a:rPr lang="en-US" b="1" dirty="0"/>
+              <a:t>Off-label practice</a:t>
+            </a:r>
+            <a:r>
+              <a:rPr lang="en-US" dirty="0"/>
+              <a:t> means doctors sometimes use drugs to treat conditions they weren’t originally approved for, based on their experience or new evidence.</a:t>
+            </a:r>
+          </a:p>
+          <a:p>
+            <a:endParaRPr lang="en-SA" dirty="0"/>
+          </a:p>
+          <a:p>
+            <a:r>
+              <a:rPr lang="en-US" dirty="0"/>
+              <a:t>Check link for more examples https://</a:t>
+            </a:r>
+            <a:r>
+              <a:rPr lang="en-US" dirty="0" err="1"/>
+              <a:t>watershed.bio</a:t>
+            </a:r>
+            <a:r>
+              <a:rPr lang="en-US" dirty="0"/>
+              <a:t>/resources/foundation-models-for-biomedical-research</a:t>
+            </a:r>
+            <a:endParaRPr lang="en-SA" dirty="0"/>
+          </a:p>
+        </p:txBody>
+      </p:sp>
+      <p:sp>
+        <p:nvSpPr>
+          <p:cNvPr id="4" name="Slide Number Placeholder 3"/>
+          <p:cNvSpPr>
+            <a:spLocks noGrp="1"/>
+          </p:cNvSpPr>
+          <p:nvPr>
+            <p:ph type="sldNum" sz="quarter" idx="5"/>
+          </p:nvPr>
+        </p:nvSpPr>
+        <p:spPr/>
+        <p:txBody>
+          <a:bodyPr/>
+          <a:lstStyle/>
+          <a:p>
+            <a:fld id="{77542409-6A04-4DC6-AC3A-D3758287A8F2}" type="slidenum">
+              <a:rPr lang="en-SA" smtClean="0"/>
               <a:t>17</a:t>
             </a:fld>
             <a:endParaRPr lang="en-SA"/>
@@ -13806,7 +14528,7 @@
 </p:notes>
 </file>
 
-<file path=ppt/notesSlides/notesSlide6.xml><?xml version="1.0" encoding="utf-8"?>
+<file path=ppt/notesSlides/notesSlide9.xml><?xml version="1.0" encoding="utf-8"?>
 <p:notes xmlns:a="http://schemas.openxmlformats.org/drawingml/2006/main" xmlns:r="http://schemas.openxmlformats.org/officeDocument/2006/relationships" xmlns:p="http://schemas.openxmlformats.org/presentationml/2006/main">
   <p:cSld>
     <p:spTree>
@@ -13905,392 +14627,6 @@
     <p:extLst>
       <p:ext uri="{BB962C8B-B14F-4D97-AF65-F5344CB8AC3E}">
         <p14:creationId xmlns:p14="http://schemas.microsoft.com/office/powerpoint/2010/main" val="3981805760"/>
-      </p:ext>
-    </p:extLst>
-  </p:cSld>
-  <p:clrMapOvr>
-    <a:masterClrMapping/>
-  </p:clrMapOvr>
-</p:notes>
-</file>
-
-<file path=ppt/notesSlides/notesSlide7.xml><?xml version="1.0" encoding="utf-8"?>
-<p:notes xmlns:a="http://schemas.openxmlformats.org/drawingml/2006/main" xmlns:r="http://schemas.openxmlformats.org/officeDocument/2006/relationships" xmlns:p="http://schemas.openxmlformats.org/presentationml/2006/main">
-  <p:cSld>
-    <p:spTree>
-      <p:nvGrpSpPr>
-        <p:cNvPr id="1" name=""/>
-        <p:cNvGrpSpPr/>
-        <p:nvPr/>
-      </p:nvGrpSpPr>
-      <p:grpSpPr>
-        <a:xfrm>
-          <a:off x="0" y="0"/>
-          <a:ext cx="0" cy="0"/>
-          <a:chOff x="0" y="0"/>
-          <a:chExt cx="0" cy="0"/>
-        </a:xfrm>
-      </p:grpSpPr>
-      <p:sp>
-        <p:nvSpPr>
-          <p:cNvPr id="2" name="Slide Image Placeholder 1"/>
-          <p:cNvSpPr>
-            <a:spLocks noGrp="1" noRot="1" noChangeAspect="1"/>
-          </p:cNvSpPr>
-          <p:nvPr>
-            <p:ph type="sldImg"/>
-          </p:nvPr>
-        </p:nvSpPr>
-        <p:spPr/>
-      </p:sp>
-      <p:sp>
-        <p:nvSpPr>
-          <p:cNvPr id="3" name="Notes Placeholder 2"/>
-          <p:cNvSpPr>
-            <a:spLocks noGrp="1"/>
-          </p:cNvSpPr>
-          <p:nvPr>
-            <p:ph type="body" idx="1"/>
-          </p:nvPr>
-        </p:nvSpPr>
-        <p:spPr/>
-        <p:txBody>
-          <a:bodyPr/>
-          <a:lstStyle/>
-          <a:p>
-            <a:pPr>
-              <a:buNone/>
-            </a:pPr>
-            <a:r>
-              <a:rPr lang="en-SA" b="1" dirty="0"/>
-              <a:t>🧠 </a:t>
-            </a:r>
-            <a:r>
-              <a:rPr lang="en-US" b="1" dirty="0"/>
-              <a:t>Traditional ML Models</a:t>
-            </a:r>
-          </a:p>
-          <a:p>
-            <a:pPr>
-              <a:buFont typeface="Arial" panose="020B0604020202020204" pitchFamily="34" charset="0"/>
-              <a:buChar char="•"/>
-            </a:pPr>
-            <a:r>
-              <a:rPr lang="en-US" b="1" dirty="0"/>
-              <a:t>Kelley et al., 2016</a:t>
-            </a:r>
-            <a:r>
-              <a:rPr lang="en-US" dirty="0"/>
-              <a:t> – </a:t>
-            </a:r>
-            <a:r>
-              <a:rPr lang="en-US" i="1" dirty="0"/>
-              <a:t>Basset: Learning the regulatory code of the accessible genome with deep CNNs.</a:t>
-            </a:r>
-            <a:r>
-              <a:rPr lang="en-US" dirty="0"/>
-              <a:t> Genome Research.</a:t>
-            </a:r>
-          </a:p>
-          <a:p>
-            <a:pPr>
-              <a:buFont typeface="Arial" panose="020B0604020202020204" pitchFamily="34" charset="0"/>
-              <a:buChar char="•"/>
-            </a:pPr>
-            <a:r>
-              <a:rPr lang="en-US" b="1" dirty="0"/>
-              <a:t>Ghandi et al., 2014</a:t>
-            </a:r>
-            <a:r>
-              <a:rPr lang="en-US" dirty="0"/>
-              <a:t> – </a:t>
-            </a:r>
-            <a:r>
-              <a:rPr lang="en-US" i="1" dirty="0"/>
-              <a:t>Enhanced regulatory sequence prediction using gapped k-</a:t>
-            </a:r>
-            <a:r>
-              <a:rPr lang="en-US" i="1" dirty="0" err="1"/>
-              <a:t>mer</a:t>
-            </a:r>
-            <a:r>
-              <a:rPr lang="en-US" i="1" dirty="0"/>
-              <a:t> features.</a:t>
-            </a:r>
-            <a:r>
-              <a:rPr lang="en-US" dirty="0"/>
-              <a:t> </a:t>
-            </a:r>
-            <a:r>
-              <a:rPr lang="en-US" dirty="0" err="1"/>
-              <a:t>PLoS</a:t>
-            </a:r>
-            <a:r>
-              <a:rPr lang="en-US" dirty="0"/>
-              <a:t> </a:t>
-            </a:r>
-            <a:r>
-              <a:rPr lang="en-US" dirty="0" err="1"/>
-              <a:t>Comput</a:t>
-            </a:r>
-            <a:r>
-              <a:rPr lang="en-US" dirty="0"/>
-              <a:t> Biol.</a:t>
-            </a:r>
-          </a:p>
-          <a:p>
-            <a:pPr>
-              <a:buFont typeface="Arial" panose="020B0604020202020204" pitchFamily="34" charset="0"/>
-              <a:buChar char="•"/>
-            </a:pPr>
-            <a:r>
-              <a:rPr lang="en-US" b="1" dirty="0"/>
-              <a:t>Zhou &amp; </a:t>
-            </a:r>
-            <a:r>
-              <a:rPr lang="en-US" b="1" dirty="0" err="1"/>
-              <a:t>Troyanskaya</a:t>
-            </a:r>
-            <a:r>
-              <a:rPr lang="en-US" b="1" dirty="0"/>
-              <a:t>, 2015</a:t>
-            </a:r>
-            <a:r>
-              <a:rPr lang="en-US" dirty="0"/>
-              <a:t> – </a:t>
-            </a:r>
-            <a:r>
-              <a:rPr lang="en-US" i="1" dirty="0"/>
-              <a:t>Predicting effects of noncoding variants with deep learning-based sequence model.</a:t>
-            </a:r>
-            <a:r>
-              <a:rPr lang="en-US" dirty="0"/>
-              <a:t> Nature Methods.</a:t>
-            </a:r>
-          </a:p>
-          <a:p>
-            <a:pPr>
-              <a:buFont typeface="Arial" panose="020B0604020202020204" pitchFamily="34" charset="0"/>
-              <a:buChar char="•"/>
-            </a:pPr>
-            <a:r>
-              <a:rPr lang="en-US" b="1" dirty="0"/>
-              <a:t>Ernst &amp; Kellis, 2012</a:t>
-            </a:r>
-            <a:r>
-              <a:rPr lang="en-US" dirty="0"/>
-              <a:t> – </a:t>
-            </a:r>
-            <a:r>
-              <a:rPr lang="en-US" i="1" dirty="0" err="1"/>
-              <a:t>ChromHMM</a:t>
-            </a:r>
-            <a:r>
-              <a:rPr lang="en-US" i="1" dirty="0"/>
-              <a:t>: automating chromatin-state discovery and characterization.</a:t>
-            </a:r>
-            <a:r>
-              <a:rPr lang="en-US" dirty="0"/>
-              <a:t> Nature Methods.</a:t>
-            </a:r>
-          </a:p>
-          <a:p>
-            <a:pPr>
-              <a:buNone/>
-            </a:pPr>
-            <a:br>
-              <a:rPr lang="en-US" dirty="0"/>
-            </a:br>
-            <a:endParaRPr lang="en-US" dirty="0"/>
-          </a:p>
-          <a:p>
-            <a:pPr>
-              <a:buNone/>
-            </a:pPr>
-            <a:r>
-              <a:rPr lang="en-SA" b="1" dirty="0"/>
-              <a:t>🧬 </a:t>
-            </a:r>
-            <a:r>
-              <a:rPr lang="en-US" b="1" dirty="0"/>
-              <a:t>Foundation Models</a:t>
-            </a:r>
-          </a:p>
-          <a:p>
-            <a:pPr>
-              <a:buFont typeface="Arial" panose="020B0604020202020204" pitchFamily="34" charset="0"/>
-              <a:buChar char="•"/>
-            </a:pPr>
-            <a:r>
-              <a:rPr lang="en-US" b="1" dirty="0"/>
-              <a:t>Avsec et al., 2021</a:t>
-            </a:r>
-            <a:r>
-              <a:rPr lang="en-US" dirty="0"/>
-              <a:t> – </a:t>
-            </a:r>
-            <a:r>
-              <a:rPr lang="en-US" i="1" dirty="0"/>
-              <a:t>Effective gene expression prediction from sequence using </a:t>
-            </a:r>
-            <a:r>
-              <a:rPr lang="en-US" i="1" dirty="0" err="1"/>
-              <a:t>Enformer</a:t>
-            </a:r>
-            <a:r>
-              <a:rPr lang="en-US" i="1" dirty="0"/>
-              <a:t>.</a:t>
-            </a:r>
-            <a:r>
-              <a:rPr lang="en-US" dirty="0"/>
-              <a:t> Nature Methods.</a:t>
-            </a:r>
-          </a:p>
-          <a:p>
-            <a:pPr>
-              <a:buFont typeface="Arial" panose="020B0604020202020204" pitchFamily="34" charset="0"/>
-              <a:buChar char="•"/>
-            </a:pPr>
-            <a:r>
-              <a:rPr lang="en-US" b="1" dirty="0"/>
-              <a:t>Ji et al., 2021</a:t>
-            </a:r>
-            <a:r>
-              <a:rPr lang="en-US" dirty="0"/>
-              <a:t> – </a:t>
-            </a:r>
-            <a:r>
-              <a:rPr lang="en-US" i="1" dirty="0"/>
-              <a:t>DNABERT: pre-trained bidirectional encoder representations from transformers for DNA-language.</a:t>
-            </a:r>
-            <a:r>
-              <a:rPr lang="en-US" dirty="0"/>
-              <a:t> Bioinformatics.</a:t>
-            </a:r>
-          </a:p>
-          <a:p>
-            <a:pPr>
-              <a:buFont typeface="Arial" panose="020B0604020202020204" pitchFamily="34" charset="0"/>
-              <a:buChar char="•"/>
-            </a:pPr>
-            <a:r>
-              <a:rPr lang="en-US" b="1" dirty="0"/>
-              <a:t>Nijkamp et al., 2023</a:t>
-            </a:r>
-            <a:r>
-              <a:rPr lang="en-US" dirty="0"/>
-              <a:t> – </a:t>
-            </a:r>
-            <a:r>
-              <a:rPr lang="en-US" i="1" dirty="0"/>
-              <a:t>A survey of foundation models for protein and genomic sequences.</a:t>
-            </a:r>
-            <a:r>
-              <a:rPr lang="en-US" dirty="0"/>
-              <a:t> </a:t>
-            </a:r>
-            <a:r>
-              <a:rPr lang="en-US" dirty="0" err="1"/>
-              <a:t>arXiv</a:t>
-            </a:r>
-            <a:r>
-              <a:rPr lang="en-US" dirty="0"/>
-              <a:t>.</a:t>
-            </a:r>
-          </a:p>
-          <a:p>
-            <a:pPr>
-              <a:buFont typeface="Arial" panose="020B0604020202020204" pitchFamily="34" charset="0"/>
-              <a:buChar char="•"/>
-            </a:pPr>
-            <a:r>
-              <a:rPr lang="en-US" b="1" dirty="0" err="1"/>
-              <a:t>Ferruz</a:t>
-            </a:r>
-            <a:r>
-              <a:rPr lang="en-US" b="1" dirty="0"/>
-              <a:t> et al., 2023</a:t>
-            </a:r>
-            <a:r>
-              <a:rPr lang="en-US" dirty="0"/>
-              <a:t> – </a:t>
-            </a:r>
-            <a:r>
-              <a:rPr lang="en-US" i="1" dirty="0"/>
-              <a:t>Nucleotide Transformer: building and evaluating robust foundation models for human genomics.</a:t>
-            </a:r>
-            <a:endParaRPr lang="en-US" dirty="0"/>
-          </a:p>
-          <a:p>
-            <a:pPr>
-              <a:buFont typeface="Arial" panose="020B0604020202020204" pitchFamily="34" charset="0"/>
-              <a:buChar char="•"/>
-            </a:pPr>
-            <a:r>
-              <a:rPr lang="en-US" b="1" dirty="0"/>
-              <a:t>Zou et al., 2023</a:t>
-            </a:r>
-            <a:r>
-              <a:rPr lang="en-US" dirty="0"/>
-              <a:t> – </a:t>
-            </a:r>
-            <a:r>
-              <a:rPr lang="en-US" i="1" dirty="0"/>
-              <a:t>Toward species-generalizable genomic foundation models.</a:t>
-            </a:r>
-            <a:endParaRPr lang="en-US" dirty="0"/>
-          </a:p>
-          <a:p>
-            <a:pPr>
-              <a:buFont typeface="Arial" panose="020B0604020202020204" pitchFamily="34" charset="0"/>
-              <a:buChar char="•"/>
-            </a:pPr>
-            <a:r>
-              <a:rPr lang="en-US" b="1" dirty="0"/>
-              <a:t>Zhou et al., 2023</a:t>
-            </a:r>
-            <a:r>
-              <a:rPr lang="en-US" dirty="0"/>
-              <a:t> – </a:t>
-            </a:r>
-            <a:r>
-              <a:rPr lang="en-US" i="1" dirty="0"/>
-              <a:t>Biological insights from foundation models of regulatory genomics.</a:t>
-            </a:r>
-            <a:endParaRPr lang="en-US" dirty="0"/>
-          </a:p>
-          <a:p>
-            <a:endParaRPr lang="en-SA" dirty="0"/>
-          </a:p>
-        </p:txBody>
-      </p:sp>
-      <p:sp>
-        <p:nvSpPr>
-          <p:cNvPr id="4" name="Slide Number Placeholder 3"/>
-          <p:cNvSpPr>
-            <a:spLocks noGrp="1"/>
-          </p:cNvSpPr>
-          <p:nvPr>
-            <p:ph type="sldNum" sz="quarter" idx="5"/>
-          </p:nvPr>
-        </p:nvSpPr>
-        <p:spPr/>
-        <p:txBody>
-          <a:bodyPr/>
-          <a:lstStyle/>
-          <a:p>
-            <a:fld id="{77542409-6A04-4DC6-AC3A-D3758287A8F2}" type="slidenum">
-              <a:rPr lang="en-SA" smtClean="0"/>
-              <a:t>21</a:t>
-            </a:fld>
-            <a:endParaRPr lang="en-SA"/>
-          </a:p>
-        </p:txBody>
-      </p:sp>
-    </p:spTree>
-    <p:extLst>
-      <p:ext uri="{BB962C8B-B14F-4D97-AF65-F5344CB8AC3E}">
-        <p14:creationId xmlns:p14="http://schemas.microsoft.com/office/powerpoint/2010/main" val="2474412391"/>
       </p:ext>
     </p:extLst>
   </p:cSld>
@@ -17922,7 +18258,7 @@
             <a:pPr lvl="1"/>
             <a:r>
               <a:rPr lang="en-US" dirty="0"/>
-              <a:t>Automatically learns patterns from data (e.g., motif grammar, syntax) splice site detection in DNABERT</a:t>
+              <a:t>Automatically learns hierarchical patterns (e.g., motif grammar, regulatory syntax)"</a:t>
             </a:r>
             <a:endParaRPr lang="en-SA" dirty="0"/>
           </a:p>
@@ -18012,7 +18348,7 @@
                   <a:srgbClr val="C00000"/>
                 </a:solidFill>
               </a:rPr>
-              <a:t>Traditional ML methods based on deep learning also implicitly learns features, however it may not be that strong due to context and data scale difference</a:t>
+              <a:t>Supervised Deep Learning (e.g., CNNs) also learns features, but they are task-specific. Foundation Models learn universal representations applicable to many tasks</a:t>
             </a:r>
           </a:p>
         </p:txBody>
@@ -18090,7 +18426,7 @@
           <a:p>
             <a:r>
               <a:rPr lang="en-US" dirty="0"/>
-              <a:t>Data Requirements: Training Data Needs</a:t>
+              <a:t>Training strategy: Annotation to Computation</a:t>
             </a:r>
             <a:endParaRPr lang="en-SA" dirty="0"/>
           </a:p>
@@ -18216,15 +18552,7 @@
             <a:pPr lvl="1"/>
             <a:r>
               <a:rPr lang="en-US" dirty="0"/>
-              <a:t>Self-supervised learning (e.g., masked k-</a:t>
-            </a:r>
-            <a:r>
-              <a:rPr lang="en-US" dirty="0" err="1"/>
-              <a:t>mer</a:t>
-            </a:r>
-            <a:r>
-              <a:rPr lang="en-US" dirty="0"/>
-              <a:t> prediction)</a:t>
+              <a:t>Self-supervised learning (Masked Language Modeling)</a:t>
             </a:r>
           </a:p>
           <a:p>
@@ -18238,7 +18566,7 @@
             <a:pPr lvl="1"/>
             <a:r>
               <a:rPr lang="en-US" dirty="0"/>
-              <a:t>Fine-tuning requires minimal labeled data (few-shot learning)</a:t>
+              <a:t>Fine-tuning requires relatively smaller labeled data (few-shot learning)</a:t>
             </a:r>
             <a:endParaRPr lang="en-SA" dirty="0"/>
           </a:p>
@@ -18307,7 +18635,7 @@
         </p:nvSpPr>
         <p:spPr>
           <a:xfrm>
-            <a:off x="1485900" y="6020988"/>
+            <a:off x="1485902" y="5935582"/>
             <a:ext cx="9296073" cy="646331"/>
           </a:xfrm>
           <a:prstGeom prst="rect">
@@ -18328,7 +18656,7 @@
                   <a:srgbClr val="C00000"/>
                 </a:solidFill>
               </a:rPr>
-              <a:t>Larger data processing usually required larger infrastructure and may not be practical for most research labs</a:t>
+              <a:t>Larger data processing usually requires larger infrastructure and may not be practical for most research labs</a:t>
             </a:r>
             <a:endParaRPr lang="en-SA" dirty="0"/>
           </a:p>
@@ -18539,7 +18867,7 @@
             <a:pPr lvl="1"/>
             <a:r>
               <a:rPr lang="en-US" dirty="0"/>
-              <a:t>Capture conserved regulatory patterns across evolution</a:t>
+              <a:t>Learns universal regulatory syntax (e.g., motif logic) shared across evolution</a:t>
             </a:r>
           </a:p>
           <a:p>
@@ -18631,12 +18959,20 @@
           <a:p>
             <a:pPr algn="ctr"/>
             <a:r>
+              <a:rPr lang="en-US" dirty="0">
+                <a:solidFill>
+                  <a:srgbClr val="C00000"/>
+                </a:solidFill>
+              </a:rPr>
+              <a:t>While traditional transfer learning relied heavily on </a:t>
+            </a:r>
+            <a:r>
               <a:rPr lang="en-US" b="1" dirty="0">
                 <a:solidFill>
                   <a:srgbClr val="C00000"/>
                 </a:solidFill>
               </a:rPr>
-              <a:t>Transfer of engineered features</a:t>
+              <a:t>feature reuse,</a:t>
             </a:r>
             <a:r>
               <a:rPr lang="en-US" dirty="0">
@@ -18644,7 +18980,7 @@
                   <a:srgbClr val="C00000"/>
                 </a:solidFill>
               </a:rPr>
-              <a:t>, and </a:t>
+              <a:t> foundation Models enable </a:t>
             </a:r>
             <a:r>
               <a:rPr lang="en-US" b="1" dirty="0">
@@ -18652,7 +18988,7 @@
                   <a:srgbClr val="C00000"/>
                 </a:solidFill>
               </a:rPr>
-              <a:t>meta-learning</a:t>
+              <a:t>model reuse</a:t>
             </a:r>
             <a:r>
               <a:rPr lang="en-US" dirty="0">
@@ -18660,7 +18996,7 @@
                   <a:srgbClr val="C00000"/>
                 </a:solidFill>
               </a:rPr>
-              <a:t> may be used to bridge some tasks in classical ML</a:t>
+              <a:t> via fine-tuning &amp; prompting</a:t>
             </a:r>
           </a:p>
         </p:txBody>
@@ -18794,7 +19130,7 @@
             <a:pPr lvl="1"/>
             <a:r>
               <a:rPr lang="en-US" dirty="0"/>
-              <a:t>Performance stagnates with large datasets</a:t>
+              <a:t>Performance usually stagnates with large datasets</a:t>
             </a:r>
           </a:p>
           <a:p>
@@ -18808,7 +19144,7 @@
             <a:pPr lvl="1"/>
             <a:r>
               <a:rPr lang="en-US" dirty="0"/>
-              <a:t>Typically handles short sequences (≤1000 bp)</a:t>
+              <a:t>Typically handles short sequences (≤1000 bp). Examples are SVM, RF</a:t>
             </a:r>
           </a:p>
         </p:txBody>
@@ -18863,7 +19199,7 @@
             <a:pPr lvl="1"/>
             <a:r>
               <a:rPr lang="en-US" dirty="0"/>
-              <a:t>Uses transformer or efficient variants (e.g., Hyena, Performer)</a:t>
+              <a:t>Uses transformer or efficient variants (e.g., Hyena, Mamba)</a:t>
             </a:r>
           </a:p>
           <a:p>
@@ -19186,7 +19522,7 @@
             <a:pPr lvl="1"/>
             <a:r>
               <a:rPr lang="en-US" dirty="0"/>
-              <a:t>Learns regulatory rules, chromatin logic, 3D interactions</a:t>
+              <a:t>Learns regulatory syntax</a:t>
             </a:r>
           </a:p>
           <a:p>
@@ -19290,7 +19626,7 @@
                   <a:srgbClr val="C00000"/>
                 </a:solidFill>
               </a:rPr>
-              <a:t>Interpretability still </a:t>
+              <a:t>Interpretability remains the </a:t>
             </a:r>
             <a:r>
               <a:rPr lang="en-US" b="1" dirty="0">
@@ -19298,7 +19634,7 @@
                   <a:srgbClr val="C00000"/>
                 </a:solidFill>
               </a:rPr>
-              <a:t>matters deeply</a:t>
+              <a:t>trust bottleneck</a:t>
             </a:r>
             <a:r>
               <a:rPr lang="en-US" dirty="0">
@@ -19306,7 +19642,7 @@
                   <a:srgbClr val="C00000"/>
                 </a:solidFill>
               </a:rPr>
-              <a:t> in regulatory genomics and medicine</a:t>
+              <a:t> for clinical adoption, despite the power of discovery</a:t>
             </a:r>
           </a:p>
         </p:txBody>
@@ -19380,7 +19716,7 @@
                   <a:srgbClr val="FF0000"/>
                 </a:solidFill>
               </a:rPr>
-              <a:t>Quick Check: Genomic Foundation Models</a:t>
+              <a:t>Quick Check: Biological Foundation Models</a:t>
             </a:r>
             <a:endParaRPr lang="en-SA" dirty="0">
               <a:solidFill>
@@ -19413,7 +19749,7 @@
           <a:p>
             <a:r>
               <a:rPr lang="en-US" sz="2400" dirty="0"/>
-              <a:t>What is the primary advantage of genomic foundation models over traditional task-specific models?</a:t>
+              <a:t>What is the primary advantage of biological foundation models over traditional task-specific models?</a:t>
             </a:r>
           </a:p>
           <a:p>
@@ -19886,7 +20222,7 @@
             <p:ph idx="1"/>
             <p:extLst>
               <p:ext uri="{D42A27DB-BD31-4B8C-83A1-F6EECF244321}">
-                <p14:modId xmlns:p14="http://schemas.microsoft.com/office/powerpoint/2010/main" val="396538645"/>
+                <p14:modId xmlns:p14="http://schemas.microsoft.com/office/powerpoint/2010/main" val="173815646"/>
               </p:ext>
             </p:extLst>
           </p:nvPr>
@@ -20429,7 +20765,7 @@
           <p:nvPr>
             <p:extLst>
               <p:ext uri="{D42A27DB-BD31-4B8C-83A1-F6EECF244321}">
-                <p14:modId xmlns:p14="http://schemas.microsoft.com/office/powerpoint/2010/main" val="677661216"/>
+                <p14:modId xmlns:p14="http://schemas.microsoft.com/office/powerpoint/2010/main" val="171796925"/>
               </p:ext>
             </p:extLst>
           </p:nvPr>
@@ -21355,7 +21691,14 @@
           <a:p>
             <a:r>
               <a:rPr lang="en-US" dirty="0"/>
-              <a:t>Brief History of Deep Learning</a:t>
+              <a:t>Enabling Foundation Models: </a:t>
+            </a:r>
+            <a:br>
+              <a:rPr lang="en-US" dirty="0"/>
+            </a:br>
+            <a:r>
+              <a:rPr lang="en-US" dirty="0"/>
+              <a:t>Key Breakthroughs in Deep Learning</a:t>
             </a:r>
             <a:endParaRPr lang="en-SA" dirty="0"/>
           </a:p>
@@ -21363,10 +21706,10 @@
       </p:sp>
       <p:pic>
         <p:nvPicPr>
-          <p:cNvPr id="4" name="Content Placeholder 3">
+          <p:cNvPr id="10" name="Content Placeholder 9">
             <a:extLst>
               <a:ext uri="{FF2B5EF4-FFF2-40B4-BE49-F238E27FC236}">
-                <a16:creationId xmlns:a16="http://schemas.microsoft.com/office/drawing/2014/main" id="{F9B210EC-E97F-0B3B-9DAB-FC84469895A5}"/>
+                <a16:creationId xmlns:a16="http://schemas.microsoft.com/office/drawing/2014/main" id="{1012B03A-5245-04FC-CCAD-87BAD3E077C7}"/>
               </a:ext>
             </a:extLst>
           </p:cNvPr>
@@ -21378,15 +21721,15 @@
           </p:nvPr>
         </p:nvPicPr>
         <p:blipFill>
-          <a:blip r:embed="rId2"/>
+          <a:blip r:embed="rId3"/>
           <a:stretch>
             <a:fillRect/>
           </a:stretch>
         </p:blipFill>
         <p:spPr>
           <a:xfrm>
-            <a:off x="1409700" y="2108961"/>
-            <a:ext cx="9372600" cy="3533841"/>
+            <a:off x="996340" y="2364732"/>
+            <a:ext cx="10481039" cy="3071563"/>
           </a:xfrm>
           <a:prstGeom prst="rect">
             <a:avLst/>
@@ -21477,8 +21820,8 @@
         </p:nvSpPr>
         <p:spPr>
           <a:xfrm>
-            <a:off x="1315749" y="1852543"/>
-            <a:ext cx="6126773" cy="1183567"/>
+            <a:off x="1315748" y="1589245"/>
+            <a:ext cx="6126773" cy="1666189"/>
           </a:xfrm>
           <a:prstGeom prst="roundRect">
             <a:avLst>
@@ -21512,12 +21855,48 @@
           <a:lstStyle/>
           <a:p>
             <a:r>
-              <a:rPr lang="en-US" dirty="0">
-                <a:solidFill>
-                  <a:schemeClr val="bg1"/>
-                </a:solidFill>
-              </a:rPr>
-              <a:t>Large Language Model (LLM) are large-scale machine learning models trained on vast datasets from Internet</a:t>
+              <a:rPr lang="en-US" dirty="0"/>
+              <a:t>A Large Language Model (LLM) is a </a:t>
+            </a:r>
+          </a:p>
+          <a:p>
+            <a:pPr marL="285750" indent="-285750">
+              <a:buFont typeface="Arial" panose="020B0604020202020204" pitchFamily="34" charset="0"/>
+              <a:buChar char="•"/>
+            </a:pPr>
+            <a:r>
+              <a:rPr lang="en-US" dirty="0"/>
+              <a:t>(Mostly) Transformer-based neural network </a:t>
+            </a:r>
+          </a:p>
+          <a:p>
+            <a:pPr marL="285750" indent="-285750">
+              <a:buFont typeface="Arial" panose="020B0604020202020204" pitchFamily="34" charset="0"/>
+              <a:buChar char="•"/>
+            </a:pPr>
+            <a:r>
+              <a:rPr lang="en-US" dirty="0"/>
+              <a:t>Trained on large-scale text (or multimodal) data </a:t>
+            </a:r>
+          </a:p>
+          <a:p>
+            <a:pPr marL="285750" indent="-285750">
+              <a:buFont typeface="Arial" panose="020B0604020202020204" pitchFamily="34" charset="0"/>
+              <a:buChar char="•"/>
+            </a:pPr>
+            <a:r>
+              <a:rPr lang="en-US" dirty="0"/>
+              <a:t>Model token probabilities, </a:t>
+            </a:r>
+          </a:p>
+          <a:p>
+            <a:pPr marL="285750" indent="-285750">
+              <a:buFont typeface="Arial" panose="020B0604020202020204" pitchFamily="34" charset="0"/>
+              <a:buChar char="•"/>
+            </a:pPr>
+            <a:r>
+              <a:rPr lang="en-US" dirty="0"/>
+              <a:t>(typically) by minimizing cross-entropy loss over tokens</a:t>
             </a:r>
             <a:endParaRPr lang="en-SA" dirty="0">
               <a:solidFill>
@@ -21542,7 +21921,7 @@
           <p:nvPr/>
         </p:nvPicPr>
         <p:blipFill>
-          <a:blip r:embed="rId2"/>
+          <a:blip r:embed="rId3"/>
           <a:stretch>
             <a:fillRect/>
           </a:stretch>
@@ -21573,8 +21952,8 @@
             </p:nvSpPr>
             <p:spPr>
               <a:xfrm>
-                <a:off x="1315750" y="3429000"/>
-                <a:ext cx="6126772" cy="2567301"/>
+                <a:off x="1315748" y="3429000"/>
+                <a:ext cx="6126772" cy="2860373"/>
               </a:xfrm>
               <a:prstGeom prst="roundRect">
                 <a:avLst>
@@ -21599,7 +21978,7 @@
                       <a:schemeClr val="bg1"/>
                     </a:solidFill>
                   </a:rPr>
-                  <a:t>Designed to serve as adaptable starting points for downstream tasks via</a:t>
+                  <a:t>Serves as adaptable starting points for downstream tasks via</a:t>
                 </a:r>
               </a:p>
               <a:p>
@@ -21615,6 +21994,19 @@
                   </a:rPr>
                   <a:t>Fine-tuning </a:t>
                 </a:r>
+                <a:r>
+                  <a:rPr lang="en-US" dirty="0">
+                    <a:solidFill>
+                      <a:schemeClr val="bg1"/>
+                    </a:solidFill>
+                  </a:rPr>
+                  <a:t>(continued training on task-specific data)</a:t>
+                </a:r>
+                <a:endParaRPr lang="en-SA" dirty="0">
+                  <a:solidFill>
+                    <a:schemeClr val="bg1"/>
+                  </a:solidFill>
+                </a:endParaRPr>
               </a:p>
               <a:p>
                 <a:pPr marL="285750" indent="-285750">
@@ -21622,12 +22014,26 @@
                   <a:buChar char="•"/>
                 </a:pPr>
                 <a:r>
-                  <a:rPr lang="en-SA" dirty="0">
+                  <a:rPr lang="en-US" dirty="0">
                     <a:solidFill>
                       <a:schemeClr val="bg1"/>
                     </a:solidFill>
                   </a:rPr>
-                  <a:t>Prompt engineering</a:t>
+                  <a:t>Prompting (zero-shot/few-shot inference)</a:t>
+                </a:r>
+              </a:p>
+              <a:p>
+                <a:pPr marL="285750" indent="-285750">
+                  <a:buFont typeface="Arial" panose="020B0604020202020204" pitchFamily="34" charset="0"/>
+                  <a:buChar char="•"/>
+                </a:pPr>
+                <a:r>
+                  <a:rPr lang="en-US" dirty="0">
+                    <a:solidFill>
+                      <a:schemeClr val="bg1"/>
+                    </a:solidFill>
+                  </a:rPr>
+                  <a:t>Alignment (RLHF, DPO, etc. to align with human preferences)</a:t>
                 </a:r>
               </a:p>
               <a:p>
@@ -21644,10 +22050,11 @@
                       <a:schemeClr val="bg1"/>
                     </a:solidFill>
                   </a:rPr>
-                  <a:t>Mathematically</a:t>
+                  <a:t>Mathematically (for auto-regressive models)</a:t>
                 </a:r>
               </a:p>
               <a:p>
+                <a:pPr/>
                 <a14:m>
                   <m:oMathPara xmlns:m="http://schemas.openxmlformats.org/officeDocument/2006/math">
                     <m:oMathParaPr>
@@ -21830,8 +22237,8 @@
             </p:nvSpPr>
             <p:spPr>
               <a:xfrm>
-                <a:off x="1315750" y="3429000"/>
-                <a:ext cx="6126772" cy="2567301"/>
+                <a:off x="1315748" y="3429000"/>
+                <a:ext cx="6126772" cy="2860373"/>
               </a:xfrm>
               <a:prstGeom prst="roundRect">
                 <a:avLst>
@@ -21839,9 +22246,9 @@
                 </a:avLst>
               </a:prstGeom>
               <a:blipFill>
-                <a:blip r:embed="rId3"/>
+                <a:blip r:embed="rId4"/>
                 <a:stretch>
-                  <a:fillRect b="-48276"/>
+                  <a:fillRect b="-42920"/>
                 </a:stretch>
               </a:blipFill>
             </p:spPr>
@@ -21875,7 +22282,7 @@
           <p:nvPr/>
         </p:nvPicPr>
         <p:blipFill>
-          <a:blip r:embed="rId4">
+          <a:blip r:embed="rId5">
             <a:extLst>
               <a:ext uri="{28A0092B-C50C-407E-A947-70E740481C1C}">
                 <a14:useLocalDpi xmlns:a14="http://schemas.microsoft.com/office/drawing/2010/main" val="0"/>
@@ -22081,7 +22488,7 @@
           <a:p>
             <a:r>
               <a:rPr lang="en-US" dirty="0"/>
-              <a:t>What is a Genomic Foundation Models?</a:t>
+              <a:t>Foundation Models in Bioinformatics</a:t>
             </a:r>
             <a:endParaRPr lang="en-SA" dirty="0"/>
           </a:p>
@@ -22101,10 +22508,10 @@
         </p:nvGrpSpPr>
         <p:grpSpPr>
           <a:xfrm>
-            <a:off x="1304599" y="1780260"/>
-            <a:ext cx="4801297" cy="2144583"/>
+            <a:off x="1305854" y="2119492"/>
+            <a:ext cx="4801297" cy="1851259"/>
             <a:chOff x="1398874" y="1941281"/>
-            <a:chExt cx="4801297" cy="2144583"/>
+            <a:chExt cx="4801297" cy="1851259"/>
           </a:xfrm>
         </p:grpSpPr>
         <p:sp>
@@ -22122,7 +22529,7 @@
           <p:spPr>
             <a:xfrm>
               <a:off x="1410024" y="2150650"/>
-              <a:ext cx="4790147" cy="1935214"/>
+              <a:ext cx="4790147" cy="1641890"/>
             </a:xfrm>
             <a:prstGeom prst="roundRect">
               <a:avLst>
@@ -22156,7 +22563,7 @@
             <a:bodyPr rtlCol="0" anchor="t"/>
             <a:lstStyle/>
             <a:p>
-              <a:endParaRPr lang="en-US" dirty="0">
+              <a:endParaRPr lang="en-US" sz="1600" dirty="0">
                 <a:solidFill>
                   <a:schemeClr val="tx1"/>
                 </a:solidFill>
@@ -22164,15 +22571,15 @@
             </a:p>
             <a:p>
               <a:r>
-                <a:rPr lang="en-US" dirty="0">
+                <a:rPr lang="en-US" sz="1600" dirty="0">
                   <a:solidFill>
                     <a:schemeClr val="tx1"/>
                   </a:solidFill>
                 </a:rPr>
-                <a:t>Genomic Foundation Models are </a:t>
+                <a:t>Foundation Models in Bioinformatics are </a:t>
               </a:r>
               <a:r>
-                <a:rPr lang="en-US" dirty="0">
+                <a:rPr lang="en-US" sz="1600" dirty="0">
                   <a:solidFill>
                     <a:srgbClr val="7030A0"/>
                   </a:solidFill>
@@ -22180,7 +22587,7 @@
                 <a:t>large-scale</a:t>
               </a:r>
               <a:r>
-                <a:rPr lang="en-US" dirty="0">
+                <a:rPr lang="en-US" sz="1600" dirty="0">
                   <a:solidFill>
                     <a:schemeClr val="tx1"/>
                   </a:solidFill>
@@ -22188,7 +22595,7 @@
                 <a:t> </a:t>
               </a:r>
               <a:r>
-                <a:rPr lang="en-US" dirty="0">
+                <a:rPr lang="en-US" sz="1600" dirty="0">
                   <a:solidFill>
                     <a:srgbClr val="FF0000"/>
                   </a:solidFill>
@@ -22196,7 +22603,7 @@
                 <a:t>machine learning models</a:t>
               </a:r>
               <a:r>
-                <a:rPr lang="en-US" dirty="0">
+                <a:rPr lang="en-US" sz="1600" dirty="0">
                   <a:solidFill>
                     <a:schemeClr val="tx1"/>
                   </a:solidFill>
@@ -22204,15 +22611,15 @@
                 <a:t> trained on </a:t>
               </a:r>
               <a:r>
-                <a:rPr lang="en-US" dirty="0">
+                <a:rPr lang="en-US" sz="1600" dirty="0">
                   <a:solidFill>
                     <a:srgbClr val="7030A0"/>
                   </a:solidFill>
                 </a:rPr>
-                <a:t>vast genomic datasets </a:t>
+                <a:t>vast biological datasets (e.g., DNA, protein sequences, single-cell data) </a:t>
               </a:r>
               <a:r>
-                <a:rPr lang="en-US" dirty="0">
+                <a:rPr lang="en-US" sz="1600" dirty="0">
                   <a:solidFill>
                     <a:schemeClr val="tx1"/>
                   </a:solidFill>
@@ -22220,7 +22627,7 @@
                 <a:t>that can be </a:t>
               </a:r>
               <a:r>
-                <a:rPr lang="en-US" dirty="0">
+                <a:rPr lang="en-US" sz="1600" dirty="0">
                   <a:solidFill>
                     <a:srgbClr val="FF0000"/>
                   </a:solidFill>
@@ -22228,7 +22635,7 @@
                 <a:t>adapted to a wide range of downstream tasks</a:t>
               </a:r>
               <a:r>
-                <a:rPr lang="en-US" dirty="0">
+                <a:rPr lang="en-US" sz="1600" dirty="0">
                   <a:solidFill>
                     <a:schemeClr val="tx1"/>
                   </a:solidFill>
@@ -22236,14 +22643,14 @@
                 <a:t> with </a:t>
               </a:r>
               <a:r>
-                <a:rPr lang="en-US" dirty="0">
+                <a:rPr lang="en-US" sz="1600" dirty="0">
                   <a:solidFill>
                     <a:srgbClr val="7030A0"/>
                   </a:solidFill>
                 </a:rPr>
-                <a:t>minimal additional training</a:t>
+                <a:t>limited additional training</a:t>
               </a:r>
-              <a:endParaRPr lang="en-SA" dirty="0">
+              <a:endParaRPr lang="en-SA" sz="1600" dirty="0">
                 <a:solidFill>
                   <a:srgbClr val="7030A0"/>
                 </a:solidFill>
@@ -22328,10 +22735,10 @@
         </p:nvGrpSpPr>
         <p:grpSpPr>
           <a:xfrm>
-            <a:off x="1294702" y="4128852"/>
-            <a:ext cx="4800043" cy="2144583"/>
+            <a:off x="1295957" y="4097949"/>
+            <a:ext cx="4800043" cy="1906750"/>
             <a:chOff x="6266984" y="1941281"/>
-            <a:chExt cx="4800043" cy="2144583"/>
+            <a:chExt cx="4800043" cy="1906750"/>
           </a:xfrm>
         </p:grpSpPr>
         <p:sp>
@@ -22349,7 +22756,7 @@
           <p:spPr>
             <a:xfrm>
               <a:off x="6276881" y="2150650"/>
-              <a:ext cx="4790146" cy="1935214"/>
+              <a:ext cx="4790146" cy="1697381"/>
             </a:xfrm>
             <a:prstGeom prst="roundRect">
               <a:avLst>
@@ -22387,7 +22794,7 @@
                 <a:buFont typeface="Courier New" panose="02070309020205020404" pitchFamily="49" charset="0"/>
                 <a:buChar char="o"/>
               </a:pPr>
-              <a:endParaRPr lang="en-US" dirty="0">
+              <a:endParaRPr lang="en-US" sz="1600" dirty="0">
                 <a:solidFill>
                   <a:schemeClr val="tx1"/>
                 </a:solidFill>
@@ -22399,12 +22806,12 @@
                 <a:buChar char="o"/>
               </a:pPr>
               <a:r>
-                <a:rPr lang="en-US" sz="1700" dirty="0">
+                <a:rPr lang="en-US" sz="1600" dirty="0">
                   <a:solidFill>
                     <a:schemeClr val="tx1"/>
                   </a:solidFill>
                 </a:rPr>
-                <a:t>Pre-trained on large, diverse genomic data </a:t>
+                <a:t>Pre-trained on large, diverse multi-omics data </a:t>
               </a:r>
             </a:p>
             <a:p>
@@ -22413,7 +22820,7 @@
                 <a:buChar char="o"/>
               </a:pPr>
               <a:r>
-                <a:rPr lang="en-US" sz="1700" dirty="0">
+                <a:rPr lang="en-US" sz="1600" dirty="0">
                   <a:solidFill>
                     <a:schemeClr val="tx1"/>
                   </a:solidFill>
@@ -22427,7 +22834,7 @@
                 <a:buChar char="o"/>
               </a:pPr>
               <a:r>
-                <a:rPr lang="en-US" sz="1700" dirty="0">
+                <a:rPr lang="en-US" sz="1600" dirty="0">
                   <a:solidFill>
                     <a:schemeClr val="tx1"/>
                   </a:solidFill>
@@ -22441,7 +22848,7 @@
                 <a:buChar char="o"/>
               </a:pPr>
               <a:r>
-                <a:rPr lang="en-US" sz="1700" dirty="0">
+                <a:rPr lang="en-US" sz="1600" dirty="0">
                   <a:solidFill>
                     <a:schemeClr val="tx1"/>
                   </a:solidFill>
@@ -22519,89 +22926,110 @@
           </p:txBody>
         </p:sp>
       </p:grpSp>
-      <p:sp>
-        <p:nvSpPr>
-          <p:cNvPr id="20" name="TextBox 19">
+      <p:grpSp>
+        <p:nvGrpSpPr>
+          <p:cNvPr id="2" name="Group 1">
             <a:extLst>
               <a:ext uri="{FF2B5EF4-FFF2-40B4-BE49-F238E27FC236}">
-                <a16:creationId xmlns:a16="http://schemas.microsoft.com/office/drawing/2014/main" id="{BAEBCB2B-B8D2-1D65-521D-6041FB093D71}"/>
+                <a16:creationId xmlns:a16="http://schemas.microsoft.com/office/drawing/2014/main" id="{53C0B267-0374-C31F-1D8B-DD33D7FE3EE6}"/>
               </a:ext>
             </a:extLst>
           </p:cNvPr>
-          <p:cNvSpPr txBox="1"/>
+          <p:cNvGrpSpPr/>
           <p:nvPr/>
-        </p:nvSpPr>
-        <p:spPr>
+        </p:nvGrpSpPr>
+        <p:grpSpPr>
           <a:xfrm>
-            <a:off x="6379676" y="5604589"/>
-            <a:ext cx="5321387" cy="400110"/>
+            <a:off x="6379676" y="2119492"/>
+            <a:ext cx="5812324" cy="4751034"/>
+            <a:chOff x="6379676" y="2119492"/>
+            <a:chExt cx="5812324" cy="4751034"/>
           </a:xfrm>
-          <a:prstGeom prst="rect">
-            <a:avLst/>
-          </a:prstGeom>
-          <a:noFill/>
-        </p:spPr>
-        <p:txBody>
-          <a:bodyPr wrap="square">
-            <a:spAutoFit/>
-          </a:bodyPr>
-          <a:lstStyle/>
-          <a:p>
-            <a:r>
-              <a:rPr lang="en-US" sz="1000" dirty="0"/>
-              <a:t>Image taken from: Guo, Fei, et al. "Foundation models in bioinformatics." National Science Review (2025): nwaf028.</a:t>
-            </a:r>
-            <a:endParaRPr lang="en-SA" sz="1000" dirty="0"/>
-          </a:p>
-        </p:txBody>
-      </p:sp>
-      <p:pic>
-        <p:nvPicPr>
-          <p:cNvPr id="4098" name="Picture 2" descr="Foundation models in bioinformatics.">
+        </p:grpSpPr>
+        <p:sp>
+          <p:nvSpPr>
+            <p:cNvPr id="20" name="TextBox 19">
+              <a:extLst>
+                <a:ext uri="{FF2B5EF4-FFF2-40B4-BE49-F238E27FC236}">
+                  <a16:creationId xmlns:a16="http://schemas.microsoft.com/office/drawing/2014/main" id="{BAEBCB2B-B8D2-1D65-521D-6041FB093D71}"/>
+                </a:ext>
+              </a:extLst>
+            </p:cNvPr>
+            <p:cNvSpPr txBox="1"/>
+            <p:nvPr/>
+          </p:nvSpPr>
+          <p:spPr>
+            <a:xfrm>
+              <a:off x="6870613" y="6624305"/>
+              <a:ext cx="5321387" cy="246221"/>
+            </a:xfrm>
+            <a:prstGeom prst="rect">
+              <a:avLst/>
+            </a:prstGeom>
+            <a:noFill/>
+          </p:spPr>
+          <p:txBody>
+            <a:bodyPr wrap="square">
+              <a:spAutoFit/>
+            </a:bodyPr>
+            <a:lstStyle/>
+            <a:p>
+              <a:r>
+                <a:rPr lang="en-US" sz="1000" dirty="0"/>
+                <a:t>Guo, Fei, et al. "Foundation models in bioinformatics." National Science Review (2025): nwaf028.</a:t>
+              </a:r>
+              <a:endParaRPr lang="en-SA" sz="1000" dirty="0"/>
+            </a:p>
+          </p:txBody>
+        </p:sp>
+        <p:pic>
+          <p:nvPicPr>
+            <p:cNvPr id="4098" name="Picture 2" descr="Foundation models in bioinformatics.">
+              <a:extLst>
+                <a:ext uri="{FF2B5EF4-FFF2-40B4-BE49-F238E27FC236}">
+                  <a16:creationId xmlns:a16="http://schemas.microsoft.com/office/drawing/2014/main" id="{3C12D6B3-4355-A83C-7BBD-2E788E6D253E}"/>
+                </a:ext>
+              </a:extLst>
+            </p:cNvPr>
+            <p:cNvPicPr>
+              <a:picLocks noChangeAspect="1" noChangeArrowheads="1"/>
+            </p:cNvPicPr>
+            <p:nvPr/>
+          </p:nvPicPr>
+          <p:blipFill>
+            <a:blip r:embed="rId3">
+              <a:extLst>
+                <a:ext uri="{28A0092B-C50C-407E-A947-70E740481C1C}">
+                  <a14:useLocalDpi xmlns:a14="http://schemas.microsoft.com/office/drawing/2010/main" val="0"/>
+                </a:ext>
+              </a:extLst>
+            </a:blip>
+            <a:srcRect/>
+            <a:stretch>
+              <a:fillRect/>
+            </a:stretch>
+          </p:blipFill>
+          <p:spPr bwMode="auto">
+            <a:xfrm>
+              <a:off x="6379676" y="2119492"/>
+              <a:ext cx="5321387" cy="3346200"/>
+            </a:xfrm>
+            <a:prstGeom prst="rect">
+              <a:avLst/>
+            </a:prstGeom>
+            <a:noFill/>
             <a:extLst>
-              <a:ext uri="{FF2B5EF4-FFF2-40B4-BE49-F238E27FC236}">
-                <a16:creationId xmlns:a16="http://schemas.microsoft.com/office/drawing/2014/main" id="{3C12D6B3-4355-A83C-7BBD-2E788E6D253E}"/>
+              <a:ext uri="{909E8E84-426E-40DD-AFC4-6F175D3DCCD1}">
+                <a14:hiddenFill xmlns:a14="http://schemas.microsoft.com/office/drawing/2010/main">
+                  <a:solidFill>
+                    <a:srgbClr val="FFFFFF"/>
+                  </a:solidFill>
+                </a14:hiddenFill>
               </a:ext>
             </a:extLst>
-          </p:cNvPr>
-          <p:cNvPicPr>
-            <a:picLocks noChangeAspect="1" noChangeArrowheads="1"/>
-          </p:cNvPicPr>
-          <p:nvPr/>
-        </p:nvPicPr>
-        <p:blipFill>
-          <a:blip r:embed="rId3">
-            <a:extLst>
-              <a:ext uri="{28A0092B-C50C-407E-A947-70E740481C1C}">
-                <a14:useLocalDpi xmlns:a14="http://schemas.microsoft.com/office/drawing/2010/main" val="0"/>
-              </a:ext>
-            </a:extLst>
-          </a:blip>
-          <a:srcRect/>
-          <a:stretch>
-            <a:fillRect/>
-          </a:stretch>
-        </p:blipFill>
-        <p:spPr bwMode="auto">
-          <a:xfrm>
-            <a:off x="6379676" y="2119492"/>
-            <a:ext cx="5321387" cy="3346200"/>
-          </a:xfrm>
-          <a:prstGeom prst="rect">
-            <a:avLst/>
-          </a:prstGeom>
-          <a:noFill/>
-          <a:extLst>
-            <a:ext uri="{909E8E84-426E-40DD-AFC4-6F175D3DCCD1}">
-              <a14:hiddenFill xmlns:a14="http://schemas.microsoft.com/office/drawing/2010/main">
-                <a:solidFill>
-                  <a:srgbClr val="FFFFFF"/>
-                </a:solidFill>
-              </a14:hiddenFill>
-            </a:ext>
-          </a:extLst>
-        </p:spPr>
-      </p:pic>
+          </p:spPr>
+        </p:pic>
+      </p:grpSp>
     </p:spTree>
     <p:extLst>
       <p:ext uri="{BB962C8B-B14F-4D97-AF65-F5344CB8AC3E}">
@@ -22763,7 +23191,7 @@
         </p:nvSpPr>
         <p:spPr>
           <a:xfrm>
-            <a:off x="2170252" y="6311085"/>
+            <a:off x="5439545" y="6611779"/>
             <a:ext cx="8015469" cy="246221"/>
           </a:xfrm>
           <a:prstGeom prst="rect">
@@ -22808,6 +23236,46 @@
               <a:t> 12.4 (2024): 339-344.</a:t>
             </a:r>
             <a:endParaRPr lang="en-SA" sz="1000" dirty="0"/>
+          </a:p>
+        </p:txBody>
+      </p:sp>
+      <p:sp>
+        <p:nvSpPr>
+          <p:cNvPr id="3" name="TextBox 2">
+            <a:extLst>
+              <a:ext uri="{FF2B5EF4-FFF2-40B4-BE49-F238E27FC236}">
+                <a16:creationId xmlns:a16="http://schemas.microsoft.com/office/drawing/2014/main" id="{5E18A729-E64B-B3BB-EFE9-E9CF870D6984}"/>
+              </a:ext>
+            </a:extLst>
+          </p:cNvPr>
+          <p:cNvSpPr txBox="1"/>
+          <p:nvPr/>
+        </p:nvSpPr>
+        <p:spPr>
+          <a:xfrm>
+            <a:off x="1410025" y="6199078"/>
+            <a:ext cx="9371949" cy="461665"/>
+          </a:xfrm>
+          <a:prstGeom prst="rect">
+            <a:avLst/>
+          </a:prstGeom>
+          <a:noFill/>
+        </p:spPr>
+        <p:txBody>
+          <a:bodyPr wrap="square">
+            <a:spAutoFit/>
+          </a:bodyPr>
+          <a:lstStyle/>
+          <a:p>
+            <a:pPr algn="ctr"/>
+            <a:r>
+              <a:rPr lang="en-US" sz="2400" dirty="0">
+                <a:solidFill>
+                  <a:srgbClr val="C00000"/>
+                </a:solidFill>
+              </a:rPr>
+              <a:t>We will be focusing on genomic foundation models in this workshop</a:t>
+            </a:r>
           </a:p>
         </p:txBody>
       </p:sp>
@@ -23008,7 +23476,7 @@
           <a:p>
             <a:r>
               <a:rPr lang="en-US" dirty="0"/>
-              <a:t>One model per genomic task</a:t>
+              <a:t>Usually one model per genomic task</a:t>
             </a:r>
           </a:p>
           <a:p>
@@ -23078,7 +23546,7 @@
           <a:p>
             <a:r>
               <a:rPr lang="en-US" dirty="0"/>
-              <a:t>One model for many genomic tasks</a:t>
+              <a:t>One model for many downstream genomic tasks</a:t>
             </a:r>
           </a:p>
           <a:p>
@@ -23089,14 +23557,14 @@
             </a:r>
             <a:r>
               <a:rPr lang="en-US" dirty="0"/>
-              <a:t>: chromatin profile prediction and species classification [1]</a:t>
+              <a:t>: Long-range chromatin profiling and genomic modeling [1]</a:t>
             </a:r>
           </a:p>
           <a:p>
             <a:pPr lvl="1"/>
             <a:r>
               <a:rPr lang="en-US" dirty="0"/>
-              <a:t>DNABERT: promoter prediction and splice site detection [2]</a:t>
+              <a:t>DNABERT: Local semantic features like promoter prediction and TF binding sites detection [2]</a:t>
             </a:r>
             <a:endParaRPr lang="en-SA" dirty="0"/>
           </a:p>
@@ -24016,15 +24484,6 @@
 </file>
 
 <file path=customXml/item1.xml><?xml version="1.0" encoding="utf-8"?>
-<?mso-contentType ?>
-<FormTemplates xmlns="http://schemas.microsoft.com/sharepoint/v3/contenttype/forms">
-  <Display>DocumentLibraryForm</Display>
-  <Edit>DocumentLibraryForm</Edit>
-  <New>DocumentLibraryForm</New>
-</FormTemplates>
-</file>
-
-<file path=customXml/item2.xml><?xml version="1.0" encoding="utf-8"?>
 <p:properties xmlns:p="http://schemas.microsoft.com/office/2006/metadata/properties" xmlns:xsi="http://www.w3.org/2001/XMLSchema-instance" xmlns:pc="http://schemas.microsoft.com/office/infopath/2007/PartnerControls">
   <documentManagement>
     <_ip_UnifiedCompliancePolicyUIAction xmlns="http://schemas.microsoft.com/sharepoint/v3" xsi:nil="true"/>
@@ -24042,6 +24501,15 @@
     <MediaServiceKeyPoints xmlns="71af3243-3dd4-4a8d-8c0d-dd76da1f02a5" xsi:nil="true"/>
   </documentManagement>
 </p:properties>
+</file>
+
+<file path=customXml/item2.xml><?xml version="1.0" encoding="utf-8"?>
+<?mso-contentType ?>
+<FormTemplates xmlns="http://schemas.microsoft.com/sharepoint/v3/contenttype/forms">
+  <Display>DocumentLibraryForm</Display>
+  <Edit>DocumentLibraryForm</Edit>
+  <New>DocumentLibraryForm</New>
+</FormTemplates>
 </file>
 
 <file path=customXml/item3.xml><?xml version="1.0" encoding="utf-8"?>
@@ -24351,14 +24819,6 @@
 </file>
 
 <file path=customXml/itemProps1.xml><?xml version="1.0" encoding="utf-8"?>
-<ds:datastoreItem xmlns:ds="http://schemas.openxmlformats.org/officeDocument/2006/customXml" ds:itemID="{78F2847D-96C7-4634-93AB-D232DDB6E5EB}">
-  <ds:schemaRefs>
-    <ds:schemaRef ds:uri="http://schemas.microsoft.com/sharepoint/v3/contenttype/forms"/>
-  </ds:schemaRefs>
-</ds:datastoreItem>
-</file>
-
-<file path=customXml/itemProps2.xml><?xml version="1.0" encoding="utf-8"?>
 <ds:datastoreItem xmlns:ds="http://schemas.openxmlformats.org/officeDocument/2006/customXml" ds:itemID="{4D18307F-863E-465D-9426-B14DA0CBD25E}">
   <ds:schemaRefs>
     <ds:schemaRef ds:uri="http://schemas.microsoft.com/sharepoint/v3"/>
@@ -24373,6 +24833,14 @@
     <ds:schemaRef ds:uri="http://schemas.openxmlformats.org/package/2006/metadata/core-properties"/>
     <ds:schemaRef ds:uri="71af3243-3dd4-4a8d-8c0d-dd76da1f02a5"/>
     <ds:schemaRef ds:uri="http://purl.org/dc/dcmitype/"/>
+  </ds:schemaRefs>
+</ds:datastoreItem>
+</file>
+
+<file path=customXml/itemProps2.xml><?xml version="1.0" encoding="utf-8"?>
+<ds:datastoreItem xmlns:ds="http://schemas.openxmlformats.org/officeDocument/2006/customXml" ds:itemID="{78F2847D-96C7-4634-93AB-D232DDB6E5EB}">
+  <ds:schemaRefs>
+    <ds:schemaRef ds:uri="http://schemas.microsoft.com/sharepoint/v3/contenttype/forms"/>
   </ds:schemaRefs>
 </ds:datastoreItem>
 </file>

--- a/lecture_slides/1.day1_before_lunch/lecture_1a_intro_gfm.pptx
+++ b/lecture_slides/1.day1_before_lunch/lecture_1a_intro_gfm.pptx
@@ -5,10 +5,10 @@
     <p:sldMasterId id="2147483648" r:id="rId4"/>
   </p:sldMasterIdLst>
   <p:notesMasterIdLst>
-    <p:notesMasterId r:id="rId26"/>
+    <p:notesMasterId r:id="rId25"/>
   </p:notesMasterIdLst>
   <p:handoutMasterIdLst>
-    <p:handoutMasterId r:id="rId27"/>
+    <p:handoutMasterId r:id="rId26"/>
   </p:handoutMasterIdLst>
   <p:sldIdLst>
     <p:sldId id="258" r:id="rId5"/>
@@ -30,8 +30,7 @@
     <p:sldId id="326" r:id="rId21"/>
     <p:sldId id="337" r:id="rId22"/>
     <p:sldId id="321" r:id="rId23"/>
-    <p:sldId id="318" r:id="rId24"/>
-    <p:sldId id="324" r:id="rId25"/>
+    <p:sldId id="324" r:id="rId24"/>
   </p:sldIdLst>
   <p:sldSz cx="12192000" cy="6858000"/>
   <p:notesSz cx="6858000" cy="9144000"/>
@@ -5945,8 +5944,8 @@
       </dsp:nvSpPr>
       <dsp:spPr>
         <a:xfrm>
-          <a:off x="814215" y="804"/>
-          <a:ext cx="2196141" cy="1317684"/>
+          <a:off x="881444" y="1996"/>
+          <a:ext cx="2061683" cy="1237010"/>
         </a:xfrm>
         <a:prstGeom prst="rect">
           <a:avLst/>
@@ -5988,12 +5987,12 @@
         </a:fontRef>
       </dsp:style>
       <dsp:txBody>
-        <a:bodyPr spcFirstLastPara="0" vert="horz" wrap="square" lIns="64770" tIns="64770" rIns="64770" bIns="64770" numCol="1" spcCol="1270" anchor="ctr" anchorCtr="0">
+        <a:bodyPr spcFirstLastPara="0" vert="horz" wrap="square" lIns="57150" tIns="57150" rIns="57150" bIns="57150" numCol="1" spcCol="1270" anchor="ctr" anchorCtr="0">
           <a:noAutofit/>
         </a:bodyPr>
         <a:lstStyle/>
         <a:p>
-          <a:pPr marL="0" lvl="0" indent="0" algn="ctr" defTabSz="755650" rtl="0">
+          <a:pPr marL="0" lvl="0" indent="0" algn="ctr" defTabSz="666750" rtl="0">
             <a:lnSpc>
               <a:spcPct val="90000"/>
             </a:lnSpc>
@@ -6006,14 +6005,14 @@
             <a:buNone/>
           </a:pPr>
           <a:r>
-            <a:rPr lang="en-US" sz="1700" kern="1200" dirty="0"/>
+            <a:rPr lang="en-US" sz="1500" kern="1200" dirty="0"/>
             <a:t>Evolution from specialized sequence models to multimodal genomic understanding</a:t>
           </a:r>
         </a:p>
       </dsp:txBody>
       <dsp:txXfrm>
-        <a:off x="814215" y="804"/>
-        <a:ext cx="2196141" cy="1317684"/>
+        <a:off x="881444" y="1996"/>
+        <a:ext cx="2061683" cy="1237010"/>
       </dsp:txXfrm>
     </dsp:sp>
     <dsp:sp modelId="{FB2096E4-36C7-A748-ADC1-773B697266B1}">
@@ -6023,8 +6022,8 @@
       </dsp:nvSpPr>
       <dsp:spPr>
         <a:xfrm>
-          <a:off x="814215" y="1538104"/>
-          <a:ext cx="2196141" cy="1317684"/>
+          <a:off x="881444" y="1445174"/>
+          <a:ext cx="2061683" cy="1237010"/>
         </a:xfrm>
         <a:prstGeom prst="rect">
           <a:avLst/>
@@ -6066,12 +6065,12 @@
         </a:fontRef>
       </dsp:style>
       <dsp:txBody>
-        <a:bodyPr spcFirstLastPara="0" vert="horz" wrap="square" lIns="64770" tIns="64770" rIns="64770" bIns="64770" numCol="1" spcCol="1270" anchor="ctr" anchorCtr="0">
+        <a:bodyPr spcFirstLastPara="0" vert="horz" wrap="square" lIns="57150" tIns="57150" rIns="57150" bIns="57150" numCol="1" spcCol="1270" anchor="ctr" anchorCtr="0">
           <a:noAutofit/>
         </a:bodyPr>
         <a:lstStyle/>
         <a:p>
-          <a:pPr marL="0" lvl="0" indent="0" algn="ctr" defTabSz="755650" rtl="0">
+          <a:pPr marL="0" lvl="0" indent="0" algn="ctr" defTabSz="666750" rtl="0">
             <a:lnSpc>
               <a:spcPct val="90000"/>
             </a:lnSpc>
@@ -6084,14 +6083,14 @@
             <a:buNone/>
           </a:pPr>
           <a:r>
-            <a:rPr lang="en-US" sz="1700" kern="1200" dirty="0"/>
+            <a:rPr lang="en-US" sz="1500" kern="1200" dirty="0"/>
             <a:t>Increasing ability to model long-range dependencies in genomic data</a:t>
           </a:r>
         </a:p>
       </dsp:txBody>
       <dsp:txXfrm>
-        <a:off x="814215" y="1538104"/>
-        <a:ext cx="2196141" cy="1317684"/>
+        <a:off x="881444" y="1445174"/>
+        <a:ext cx="2061683" cy="1237010"/>
       </dsp:txXfrm>
     </dsp:sp>
     <dsp:sp modelId="{4E6ACD82-9272-F346-BFB0-5B4F59AD570F}">
@@ -6101,8 +6100,8 @@
       </dsp:nvSpPr>
       <dsp:spPr>
         <a:xfrm>
-          <a:off x="814215" y="3075403"/>
-          <a:ext cx="2196141" cy="1317684"/>
+          <a:off x="881444" y="2888353"/>
+          <a:ext cx="2061683" cy="1237010"/>
         </a:xfrm>
         <a:prstGeom prst="rect">
           <a:avLst/>
@@ -6144,12 +6143,12 @@
         </a:fontRef>
       </dsp:style>
       <dsp:txBody>
-        <a:bodyPr spcFirstLastPara="0" vert="horz" wrap="square" lIns="64770" tIns="64770" rIns="64770" bIns="64770" numCol="1" spcCol="1270" anchor="ctr" anchorCtr="0">
+        <a:bodyPr spcFirstLastPara="0" vert="horz" wrap="square" lIns="57150" tIns="57150" rIns="57150" bIns="57150" numCol="1" spcCol="1270" anchor="ctr" anchorCtr="0">
           <a:noAutofit/>
         </a:bodyPr>
         <a:lstStyle/>
         <a:p>
-          <a:pPr marL="0" lvl="0" indent="0" algn="ctr" defTabSz="755650" rtl="0">
+          <a:pPr marL="0" lvl="0" indent="0" algn="ctr" defTabSz="666750" rtl="0">
             <a:lnSpc>
               <a:spcPct val="90000"/>
             </a:lnSpc>
@@ -6162,14 +6161,14 @@
             <a:buNone/>
           </a:pPr>
           <a:r>
-            <a:rPr lang="en-US" sz="1700" kern="1200" dirty="0"/>
+            <a:rPr lang="en-US" sz="1500" kern="1200" dirty="0"/>
             <a:t>Transition from prediction to generation capabilities</a:t>
           </a:r>
         </a:p>
       </dsp:txBody>
       <dsp:txXfrm>
-        <a:off x="814215" y="3075403"/>
-        <a:ext cx="2196141" cy="1317684"/>
+        <a:off x="881444" y="2888353"/>
+        <a:ext cx="2061683" cy="1237010"/>
       </dsp:txXfrm>
     </dsp:sp>
   </dsp:spTree>
@@ -12796,7 +12795,7 @@
           <a:p>
             <a:fld id="{30E08F2E-5F06-4CE2-A139-452A1382A6F0}" type="datetimeFigureOut">
               <a:rPr lang="en-US"/>
-              <a:t>2/10/26</a:t>
+              <a:t>2/11/26</a:t>
             </a:fld>
             <a:endParaRPr/>
           </a:p>
@@ -12961,7 +12960,7 @@
           <a:p>
             <a:fld id="{1A4C5DC6-1594-414D-9341-ABA08739246C}" type="datetimeFigureOut">
               <a:rPr lang="en-US"/>
-              <a:t>2/10/26</a:t>
+              <a:t>2/11/26</a:t>
             </a:fld>
             <a:endParaRPr/>
           </a:p>
@@ -13674,7 +13673,7 @@
           <a:p>
             <a:fld id="{77542409-6A04-4DC6-AC3A-D3758287A8F2}" type="slidenum">
               <a:rPr lang="en-SA" smtClean="0"/>
-              <a:t>21</a:t>
+              <a:t>20</a:t>
             </a:fld>
             <a:endParaRPr lang="en-SA"/>
           </a:p>
@@ -21001,123 +21000,6 @@
 </file>
 
 <file path=ppt/slides/slide20.xml><?xml version="1.0" encoding="utf-8"?>
-<p:sld xmlns:a="http://schemas.openxmlformats.org/drawingml/2006/main" xmlns:r="http://schemas.openxmlformats.org/officeDocument/2006/relationships" xmlns:p="http://schemas.openxmlformats.org/presentationml/2006/main">
-  <p:cSld>
-    <p:spTree>
-      <p:nvGrpSpPr>
-        <p:cNvPr id="1" name=""/>
-        <p:cNvGrpSpPr/>
-        <p:nvPr/>
-      </p:nvGrpSpPr>
-      <p:grpSpPr>
-        <a:xfrm>
-          <a:off x="0" y="0"/>
-          <a:ext cx="0" cy="0"/>
-          <a:chOff x="0" y="0"/>
-          <a:chExt cx="0" cy="0"/>
-        </a:xfrm>
-      </p:grpSpPr>
-      <p:sp>
-        <p:nvSpPr>
-          <p:cNvPr id="2" name="Title 1">
-            <a:extLst>
-              <a:ext uri="{FF2B5EF4-FFF2-40B4-BE49-F238E27FC236}">
-                <a16:creationId xmlns:a16="http://schemas.microsoft.com/office/drawing/2014/main" id="{DCADDCB1-728B-F4E1-8F1E-492D566C6C58}"/>
-              </a:ext>
-            </a:extLst>
-          </p:cNvPr>
-          <p:cNvSpPr>
-            <a:spLocks noGrp="1"/>
-          </p:cNvSpPr>
-          <p:nvPr>
-            <p:ph type="title"/>
-          </p:nvPr>
-        </p:nvSpPr>
-        <p:spPr/>
-        <p:txBody>
-          <a:bodyPr/>
-          <a:lstStyle/>
-          <a:p>
-            <a:endParaRPr lang="en-SA"/>
-          </a:p>
-        </p:txBody>
-      </p:sp>
-      <p:sp>
-        <p:nvSpPr>
-          <p:cNvPr id="3" name="Content Placeholder 2">
-            <a:extLst>
-              <a:ext uri="{FF2B5EF4-FFF2-40B4-BE49-F238E27FC236}">
-                <a16:creationId xmlns:a16="http://schemas.microsoft.com/office/drawing/2014/main" id="{53CF4551-A438-8915-5098-D3C1E366A012}"/>
-              </a:ext>
-            </a:extLst>
-          </p:cNvPr>
-          <p:cNvSpPr>
-            <a:spLocks noGrp="1"/>
-          </p:cNvSpPr>
-          <p:nvPr>
-            <p:ph sz="half" idx="1"/>
-          </p:nvPr>
-        </p:nvSpPr>
-        <p:spPr/>
-        <p:txBody>
-          <a:bodyPr/>
-          <a:lstStyle/>
-          <a:p>
-            <a:endParaRPr lang="en-SA"/>
-          </a:p>
-        </p:txBody>
-      </p:sp>
-      <p:sp>
-        <p:nvSpPr>
-          <p:cNvPr id="4" name="Content Placeholder 3">
-            <a:extLst>
-              <a:ext uri="{FF2B5EF4-FFF2-40B4-BE49-F238E27FC236}">
-                <a16:creationId xmlns:a16="http://schemas.microsoft.com/office/drawing/2014/main" id="{246252A2-A72A-9AED-9582-DB42E1121E78}"/>
-              </a:ext>
-            </a:extLst>
-          </p:cNvPr>
-          <p:cNvSpPr>
-            <a:spLocks noGrp="1"/>
-          </p:cNvSpPr>
-          <p:nvPr>
-            <p:ph sz="half" idx="2"/>
-          </p:nvPr>
-        </p:nvSpPr>
-        <p:spPr/>
-        <p:txBody>
-          <a:bodyPr/>
-          <a:lstStyle/>
-          <a:p>
-            <a:endParaRPr lang="en-SA"/>
-          </a:p>
-        </p:txBody>
-      </p:sp>
-    </p:spTree>
-    <p:extLst>
-      <p:ext uri="{BB962C8B-B14F-4D97-AF65-F5344CB8AC3E}">
-        <p14:creationId xmlns:p14="http://schemas.microsoft.com/office/powerpoint/2010/main" val="2174504114"/>
-      </p:ext>
-    </p:extLst>
-  </p:cSld>
-  <p:clrMapOvr>
-    <a:masterClrMapping/>
-  </p:clrMapOvr>
-  <mc:AlternateContent xmlns:mc="http://schemas.openxmlformats.org/markup-compatibility/2006" xmlns:p14="http://schemas.microsoft.com/office/powerpoint/2010/main">
-    <mc:Choice Requires="p14">
-      <p:transition spd="med" p14:dur="700">
-        <p:fade/>
-      </p:transition>
-    </mc:Choice>
-    <mc:Fallback xmlns="">
-      <p:transition spd="med">
-        <p:fade/>
-      </p:transition>
-    </mc:Fallback>
-  </mc:AlternateContent>
-</p:sld>
-</file>
-
-<file path=ppt/slides/slide21.xml><?xml version="1.0" encoding="utf-8"?>
 <p:sld xmlns:a="http://schemas.openxmlformats.org/drawingml/2006/main" xmlns:r="http://schemas.openxmlformats.org/officeDocument/2006/relationships" xmlns:p="http://schemas.openxmlformats.org/presentationml/2006/main" show="0">
   <p:cSld>
     <p:spTree>
@@ -21936,8 +21818,8 @@
           </a:prstGeom>
         </p:spPr>
       </p:pic>
-      <mc:AlternateContent xmlns:mc="http://schemas.openxmlformats.org/markup-compatibility/2006">
-        <mc:Choice xmlns:a14="http://schemas.microsoft.com/office/drawing/2010/main" Requires="a14">
+      <mc:AlternateContent xmlns:mc="http://schemas.openxmlformats.org/markup-compatibility/2006" xmlns:a14="http://schemas.microsoft.com/office/drawing/2010/main">
+        <mc:Choice Requires="a14">
           <p:sp>
             <p:nvSpPr>
               <p:cNvPr id="4" name="TextBox 3">
@@ -22220,7 +22102,7 @@
             </p:txBody>
           </p:sp>
         </mc:Choice>
-        <mc:Fallback>
+        <mc:Fallback xmlns="">
           <p:sp>
             <p:nvSpPr>
               <p:cNvPr id="4" name="TextBox 3">
@@ -23131,8 +23013,8 @@
         </p:blipFill>
         <p:spPr bwMode="auto">
           <a:xfrm>
-            <a:off x="5234599" y="1659666"/>
-            <a:ext cx="6154890" cy="4526822"/>
+            <a:off x="5234599" y="1659990"/>
+            <a:ext cx="5610879" cy="4126711"/>
           </a:xfrm>
           <a:prstGeom prst="rect">
             <a:avLst/>
@@ -23162,14 +23044,14 @@
           <p:nvPr>
             <p:extLst>
               <p:ext uri="{D42A27DB-BD31-4B8C-83A1-F6EECF244321}">
-                <p14:modId xmlns:p14="http://schemas.microsoft.com/office/powerpoint/2010/main" val="3252694733"/>
+                <p14:modId xmlns:p14="http://schemas.microsoft.com/office/powerpoint/2010/main" val="1549940308"/>
               </p:ext>
             </p:extLst>
           </p:nvPr>
         </p:nvGraphicFramePr>
         <p:xfrm>
-          <a:off x="1410026" y="1659665"/>
-          <a:ext cx="3824573" cy="4393893"/>
+          <a:off x="1410026" y="1659666"/>
+          <a:ext cx="3824573" cy="4127360"/>
         </p:xfrm>
         <a:graphic>
           <a:graphicData uri="http://schemas.openxmlformats.org/drawingml/2006/diagram">
@@ -23253,7 +23135,7 @@
         </p:nvSpPr>
         <p:spPr>
           <a:xfrm>
-            <a:off x="1410025" y="6199078"/>
+            <a:off x="1410025" y="5986391"/>
             <a:ext cx="9371949" cy="461665"/>
           </a:xfrm>
           <a:prstGeom prst="rect">
@@ -23276,6 +23158,59 @@
               </a:rPr>
               <a:t>We will be focusing on genomic foundation models in this workshop</a:t>
             </a:r>
+          </a:p>
+        </p:txBody>
+      </p:sp>
+      <p:sp>
+        <p:nvSpPr>
+          <p:cNvPr id="5" name="Rectangle 4">
+            <a:extLst>
+              <a:ext uri="{FF2B5EF4-FFF2-40B4-BE49-F238E27FC236}">
+                <a16:creationId xmlns:a16="http://schemas.microsoft.com/office/drawing/2014/main" id="{2144CF7A-DF48-0F1D-95F2-B57A69BFC864}"/>
+              </a:ext>
+            </a:extLst>
+          </p:cNvPr>
+          <p:cNvSpPr/>
+          <p:nvPr/>
+        </p:nvSpPr>
+        <p:spPr>
+          <a:xfrm>
+            <a:off x="5523978" y="1659666"/>
+            <a:ext cx="789140" cy="4126712"/>
+          </a:xfrm>
+          <a:prstGeom prst="rect">
+            <a:avLst/>
+          </a:prstGeom>
+          <a:solidFill>
+            <a:schemeClr val="accent2">
+              <a:lumMod val="60000"/>
+              <a:lumOff val="40000"/>
+              <a:alpha val="26714"/>
+            </a:schemeClr>
+          </a:solidFill>
+        </p:spPr>
+        <p:style>
+          <a:lnRef idx="2">
+            <a:schemeClr val="accent1">
+              <a:shade val="15000"/>
+            </a:schemeClr>
+          </a:lnRef>
+          <a:fillRef idx="1">
+            <a:schemeClr val="accent1"/>
+          </a:fillRef>
+          <a:effectRef idx="0">
+            <a:schemeClr val="accent1"/>
+          </a:effectRef>
+          <a:fontRef idx="minor">
+            <a:schemeClr val="lt1"/>
+          </a:fontRef>
+        </p:style>
+        <p:txBody>
+          <a:bodyPr rtlCol="0" anchor="ctr"/>
+          <a:lstStyle/>
+          <a:p>
+            <a:pPr algn="ctr"/>
+            <a:endParaRPr lang="en-SA"/>
           </a:p>
         </p:txBody>
       </p:sp>
@@ -23301,6 +23236,92 @@
       </p:transition>
     </mc:Fallback>
   </mc:AlternateContent>
+  <p:timing>
+    <p:tnLst>
+      <p:par>
+        <p:cTn id="1" dur="indefinite" restart="never" nodeType="tmRoot">
+          <p:childTnLst>
+            <p:seq concurrent="1" nextAc="seek">
+              <p:cTn id="2" dur="indefinite" nodeType="mainSeq">
+                <p:childTnLst>
+                  <p:par>
+                    <p:cTn id="3" fill="hold">
+                      <p:stCondLst>
+                        <p:cond delay="indefinite"/>
+                      </p:stCondLst>
+                      <p:childTnLst>
+                        <p:par>
+                          <p:cTn id="4" fill="hold">
+                            <p:stCondLst>
+                              <p:cond delay="0"/>
+                            </p:stCondLst>
+                            <p:childTnLst>
+                              <p:par>
+                                <p:cTn id="5" presetID="6" presetClass="entr" presetSubtype="16" fill="hold" grpId="0" nodeType="clickEffect">
+                                  <p:stCondLst>
+                                    <p:cond delay="0"/>
+                                  </p:stCondLst>
+                                  <p:childTnLst>
+                                    <p:set>
+                                      <p:cBhvr>
+                                        <p:cTn id="6" dur="1" fill="hold">
+                                          <p:stCondLst>
+                                            <p:cond delay="0"/>
+                                          </p:stCondLst>
+                                        </p:cTn>
+                                        <p:tgtEl>
+                                          <p:spTgt spid="5"/>
+                                        </p:tgtEl>
+                                        <p:attrNameLst>
+                                          <p:attrName>style.visibility</p:attrName>
+                                        </p:attrNameLst>
+                                      </p:cBhvr>
+                                      <p:to>
+                                        <p:strVal val="visible"/>
+                                      </p:to>
+                                    </p:set>
+                                    <p:animEffect transition="in" filter="circle(in)">
+                                      <p:cBhvr>
+                                        <p:cTn id="7" dur="2000"/>
+                                        <p:tgtEl>
+                                          <p:spTgt spid="5"/>
+                                        </p:tgtEl>
+                                      </p:cBhvr>
+                                    </p:animEffect>
+                                  </p:childTnLst>
+                                </p:cTn>
+                              </p:par>
+                            </p:childTnLst>
+                          </p:cTn>
+                        </p:par>
+                      </p:childTnLst>
+                    </p:cTn>
+                  </p:par>
+                </p:childTnLst>
+              </p:cTn>
+              <p:prevCondLst>
+                <p:cond evt="onPrev" delay="0">
+                  <p:tgtEl>
+                    <p:sldTgt/>
+                  </p:tgtEl>
+                </p:cond>
+              </p:prevCondLst>
+              <p:nextCondLst>
+                <p:cond evt="onNext" delay="0">
+                  <p:tgtEl>
+                    <p:sldTgt/>
+                  </p:tgtEl>
+                </p:cond>
+              </p:nextCondLst>
+            </p:seq>
+          </p:childTnLst>
+        </p:cTn>
+      </p:par>
+    </p:tnLst>
+    <p:bldLst>
+      <p:bldP spid="5" grpId="0" animBg="1"/>
+    </p:bldLst>
+  </p:timing>
 </p:sld>
 </file>
 
@@ -24484,26 +24505,6 @@
 </file>
 
 <file path=customXml/item1.xml><?xml version="1.0" encoding="utf-8"?>
-<p:properties xmlns:p="http://schemas.microsoft.com/office/2006/metadata/properties" xmlns:xsi="http://www.w3.org/2001/XMLSchema-instance" xmlns:pc="http://schemas.microsoft.com/office/infopath/2007/PartnerControls">
-  <documentManagement>
-    <_ip_UnifiedCompliancePolicyUIAction xmlns="http://schemas.microsoft.com/sharepoint/v3" xsi:nil="true"/>
-    <Image xmlns="71af3243-3dd4-4a8d-8c0d-dd76da1f02a5">
-      <Url xsi:nil="true"/>
-      <Description xsi:nil="true"/>
-    </Image>
-    <Status xmlns="71af3243-3dd4-4a8d-8c0d-dd76da1f02a5">Not started</Status>
-    <Background xmlns="71af3243-3dd4-4a8d-8c0d-dd76da1f02a5">false</Background>
-    <_ip_UnifiedCompliancePolicyProperties xmlns="http://schemas.microsoft.com/sharepoint/v3" xsi:nil="true"/>
-    <ImageTagsTaxHTField xmlns="71af3243-3dd4-4a8d-8c0d-dd76da1f02a5">
-      <Terms xmlns="http://schemas.microsoft.com/office/infopath/2007/PartnerControls"/>
-    </ImageTagsTaxHTField>
-    <TaxCatchAll xmlns="230e9df3-be65-4c73-a93b-d1236ebd677e" xsi:nil="true"/>
-    <MediaServiceKeyPoints xmlns="71af3243-3dd4-4a8d-8c0d-dd76da1f02a5" xsi:nil="true"/>
-  </documentManagement>
-</p:properties>
-</file>
-
-<file path=customXml/item2.xml><?xml version="1.0" encoding="utf-8"?>
 <?mso-contentType ?>
 <FormTemplates xmlns="http://schemas.microsoft.com/sharepoint/v3/contenttype/forms">
   <Display>DocumentLibraryForm</Display>
@@ -24512,7 +24513,7 @@
 </FormTemplates>
 </file>
 
-<file path=customXml/item3.xml><?xml version="1.0" encoding="utf-8"?>
+<file path=customXml/item2.xml><?xml version="1.0" encoding="utf-8"?>
 <ct:contentTypeSchema xmlns:ct="http://schemas.microsoft.com/office/2006/metadata/contentType" xmlns:ma="http://schemas.microsoft.com/office/2006/metadata/properties/metaAttributes" ct:_="" ma:_="" ma:contentTypeName="Document" ma:contentTypeID="0x01010079F111ED35F8CC479449609E8A0923A6" ma:contentTypeVersion="27" ma:contentTypeDescription="Create a new document." ma:contentTypeScope="" ma:versionID="c6f9a84f66a9c8b9a21755b9ffafb945">
   <xsd:schema xmlns:xsd="http://www.w3.org/2001/XMLSchema" xmlns:xs="http://www.w3.org/2001/XMLSchema" xmlns:p="http://schemas.microsoft.com/office/2006/metadata/properties" xmlns:ns1="http://schemas.microsoft.com/sharepoint/v3" xmlns:ns2="71af3243-3dd4-4a8d-8c0d-dd76da1f02a5" xmlns:ns3="16c05727-aa75-4e4a-9b5f-8a80a1165891" xmlns:ns4="230e9df3-be65-4c73-a93b-d1236ebd677e" targetNamespace="http://schemas.microsoft.com/office/2006/metadata/properties" ma:root="true" ma:fieldsID="27df39e3e7036dff54f89ddd5805ce72" ns1:_="" ns2:_="" ns3:_="" ns4:_="">
     <xsd:import namespace="http://schemas.microsoft.com/sharepoint/v3"/>
@@ -24818,26 +24819,27 @@
 </ct:contentTypeSchema>
 </file>
 
-<file path=customXml/itemProps1.xml><?xml version="1.0" encoding="utf-8"?>
-<ds:datastoreItem xmlns:ds="http://schemas.openxmlformats.org/officeDocument/2006/customXml" ds:itemID="{4D18307F-863E-465D-9426-B14DA0CBD25E}">
-  <ds:schemaRefs>
-    <ds:schemaRef ds:uri="http://schemas.microsoft.com/sharepoint/v3"/>
-    <ds:schemaRef ds:uri="16c05727-aa75-4e4a-9b5f-8a80a1165891"/>
-    <ds:schemaRef ds:uri="http://schemas.microsoft.com/office/2006/metadata/properties"/>
-    <ds:schemaRef ds:uri="http://www.w3.org/XML/1998/namespace"/>
-    <ds:schemaRef ds:uri="230e9df3-be65-4c73-a93b-d1236ebd677e"/>
-    <ds:schemaRef ds:uri="http://purl.org/dc/terms/"/>
-    <ds:schemaRef ds:uri="http://schemas.microsoft.com/office/infopath/2007/PartnerControls"/>
-    <ds:schemaRef ds:uri="http://schemas.microsoft.com/office/2006/documentManagement/types"/>
-    <ds:schemaRef ds:uri="http://purl.org/dc/elements/1.1/"/>
-    <ds:schemaRef ds:uri="http://schemas.openxmlformats.org/package/2006/metadata/core-properties"/>
-    <ds:schemaRef ds:uri="71af3243-3dd4-4a8d-8c0d-dd76da1f02a5"/>
-    <ds:schemaRef ds:uri="http://purl.org/dc/dcmitype/"/>
-  </ds:schemaRefs>
-</ds:datastoreItem>
+<file path=customXml/item3.xml><?xml version="1.0" encoding="utf-8"?>
+<p:properties xmlns:p="http://schemas.microsoft.com/office/2006/metadata/properties" xmlns:xsi="http://www.w3.org/2001/XMLSchema-instance" xmlns:pc="http://schemas.microsoft.com/office/infopath/2007/PartnerControls">
+  <documentManagement>
+    <_ip_UnifiedCompliancePolicyUIAction xmlns="http://schemas.microsoft.com/sharepoint/v3" xsi:nil="true"/>
+    <Image xmlns="71af3243-3dd4-4a8d-8c0d-dd76da1f02a5">
+      <Url xsi:nil="true"/>
+      <Description xsi:nil="true"/>
+    </Image>
+    <Status xmlns="71af3243-3dd4-4a8d-8c0d-dd76da1f02a5">Not started</Status>
+    <Background xmlns="71af3243-3dd4-4a8d-8c0d-dd76da1f02a5">false</Background>
+    <_ip_UnifiedCompliancePolicyProperties xmlns="http://schemas.microsoft.com/sharepoint/v3" xsi:nil="true"/>
+    <ImageTagsTaxHTField xmlns="71af3243-3dd4-4a8d-8c0d-dd76da1f02a5">
+      <Terms xmlns="http://schemas.microsoft.com/office/infopath/2007/PartnerControls"/>
+    </ImageTagsTaxHTField>
+    <TaxCatchAll xmlns="230e9df3-be65-4c73-a93b-d1236ebd677e" xsi:nil="true"/>
+    <MediaServiceKeyPoints xmlns="71af3243-3dd4-4a8d-8c0d-dd76da1f02a5" xsi:nil="true"/>
+  </documentManagement>
+</p:properties>
 </file>
 
-<file path=customXml/itemProps2.xml><?xml version="1.0" encoding="utf-8"?>
+<file path=customXml/itemProps1.xml><?xml version="1.0" encoding="utf-8"?>
 <ds:datastoreItem xmlns:ds="http://schemas.openxmlformats.org/officeDocument/2006/customXml" ds:itemID="{78F2847D-96C7-4634-93AB-D232DDB6E5EB}">
   <ds:schemaRefs>
     <ds:schemaRef ds:uri="http://schemas.microsoft.com/sharepoint/v3/contenttype/forms"/>
@@ -24845,7 +24847,7 @@
 </ds:datastoreItem>
 </file>
 
-<file path=customXml/itemProps3.xml><?xml version="1.0" encoding="utf-8"?>
+<file path=customXml/itemProps2.xml><?xml version="1.0" encoding="utf-8"?>
 <ds:datastoreItem xmlns:ds="http://schemas.openxmlformats.org/officeDocument/2006/customXml" ds:itemID="{074F6EFD-5A76-4C77-A0A3-4BA9EAEE14E7}">
   <ds:schemaRefs>
     <ds:schemaRef ds:uri="http://schemas.microsoft.com/office/2006/metadata/contentType"/>
@@ -24866,6 +24868,25 @@
 </ds:datastoreItem>
 </file>
 
+<file path=customXml/itemProps3.xml><?xml version="1.0" encoding="utf-8"?>
+<ds:datastoreItem xmlns:ds="http://schemas.openxmlformats.org/officeDocument/2006/customXml" ds:itemID="{4D18307F-863E-465D-9426-B14DA0CBD25E}">
+  <ds:schemaRefs>
+    <ds:schemaRef ds:uri="http://schemas.microsoft.com/sharepoint/v3"/>
+    <ds:schemaRef ds:uri="16c05727-aa75-4e4a-9b5f-8a80a1165891"/>
+    <ds:schemaRef ds:uri="http://schemas.microsoft.com/office/2006/metadata/properties"/>
+    <ds:schemaRef ds:uri="http://www.w3.org/XML/1998/namespace"/>
+    <ds:schemaRef ds:uri="230e9df3-be65-4c73-a93b-d1236ebd677e"/>
+    <ds:schemaRef ds:uri="http://purl.org/dc/terms/"/>
+    <ds:schemaRef ds:uri="http://schemas.microsoft.com/office/infopath/2007/PartnerControls"/>
+    <ds:schemaRef ds:uri="http://schemas.microsoft.com/office/2006/documentManagement/types"/>
+    <ds:schemaRef ds:uri="http://purl.org/dc/elements/1.1/"/>
+    <ds:schemaRef ds:uri="http://schemas.openxmlformats.org/package/2006/metadata/core-properties"/>
+    <ds:schemaRef ds:uri="71af3243-3dd4-4a8d-8c0d-dd76da1f02a5"/>
+    <ds:schemaRef ds:uri="http://purl.org/dc/dcmitype/"/>
+  </ds:schemaRefs>
+</ds:datastoreItem>
+</file>
+
 <file path=docMetadata/LabelInfo.xml><?xml version="1.0" encoding="utf-8"?>
 <clbl:labelList xmlns:clbl="http://schemas.microsoft.com/office/2020/mipLabelMetadata"/>
 </file>
--- a/lecture_slides/1.day1_before_lunch/lecture_1a_intro_gfm.pptx
+++ b/lecture_slides/1.day1_before_lunch/lecture_1a_intro_gfm.pptx
@@ -3375,7 +3375,7 @@
         <a:p>
           <a:r>
             <a:rPr lang="en-US" dirty="0"/>
-            <a:t>From Multilayer NN to Large Language Models</a:t>
+            <a:t>From Simple NN to Large Language Models</a:t>
           </a:r>
         </a:p>
       </dgm:t>
@@ -5059,7 +5059,7 @@
           <a:pPr rtl="0"/>
           <a:r>
             <a:rPr lang="en-US" dirty="0"/>
-            <a:t>Evo2 achieves &gt;0.87 AUROC (state-of-the-art) in zero-shot variant prediction for BRCA1</a:t>
+            <a:t>Evo2 achieves state-of-the-art) in zero-shot variant prediction for BRCA1</a:t>
           </a:r>
         </a:p>
       </dgm:t>
@@ -5408,7 +5408,7 @@
           </a:pPr>
           <a:r>
             <a:rPr lang="en-US" sz="1600" kern="1200" dirty="0"/>
-            <a:t>From Multilayer NN to Large Language Models</a:t>
+            <a:t>From Simple NN to Large Language Models</a:t>
           </a:r>
         </a:p>
       </dsp:txBody>
@@ -7740,7 +7740,7 @@
           </a:pPr>
           <a:r>
             <a:rPr lang="en-US" sz="1600" kern="1200" dirty="0"/>
-            <a:t>Evo2 achieves &gt;0.87 AUROC (state-of-the-art) in zero-shot variant prediction for BRCA1</a:t>
+            <a:t>Evo2 achieves state-of-the-art) in zero-shot variant prediction for BRCA1</a:t>
           </a:r>
         </a:p>
         <a:p>
@@ -12795,7 +12795,7 @@
           <a:p>
             <a:fld id="{30E08F2E-5F06-4CE2-A139-452A1382A6F0}" type="datetimeFigureOut">
               <a:rPr lang="en-US"/>
-              <a:t>2/11/26</a:t>
+              <a:t>2/14/26</a:t>
             </a:fld>
             <a:endParaRPr/>
           </a:p>
@@ -12960,7 +12960,7 @@
           <a:p>
             <a:fld id="{1A4C5DC6-1594-414D-9341-ABA08739246C}" type="datetimeFigureOut">
               <a:rPr lang="en-US"/>
-              <a:t>2/11/26</a:t>
+              <a:t>2/14/26</a:t>
             </a:fld>
             <a:endParaRPr/>
           </a:p>
@@ -13311,6 +13311,114 @@
   <p:cSld>
     <p:spTree>
       <p:nvGrpSpPr>
+        <p:cNvPr id="1" name="">
+          <a:extLst>
+            <a:ext uri="{FF2B5EF4-FFF2-40B4-BE49-F238E27FC236}">
+              <a16:creationId xmlns:a16="http://schemas.microsoft.com/office/drawing/2014/main" id="{EF84D1CD-7D45-E315-2A55-8D9E412034C9}"/>
+            </a:ext>
+          </a:extLst>
+        </p:cNvPr>
+        <p:cNvGrpSpPr/>
+        <p:nvPr/>
+      </p:nvGrpSpPr>
+      <p:grpSpPr>
+        <a:xfrm>
+          <a:off x="0" y="0"/>
+          <a:ext cx="0" cy="0"/>
+          <a:chOff x="0" y="0"/>
+          <a:chExt cx="0" cy="0"/>
+        </a:xfrm>
+      </p:grpSpPr>
+      <p:sp>
+        <p:nvSpPr>
+          <p:cNvPr id="2" name="Slide Image Placeholder 1">
+            <a:extLst>
+              <a:ext uri="{FF2B5EF4-FFF2-40B4-BE49-F238E27FC236}">
+                <a16:creationId xmlns:a16="http://schemas.microsoft.com/office/drawing/2014/main" id="{3AB6E564-36C0-A37E-BE45-510F0184F57C}"/>
+              </a:ext>
+            </a:extLst>
+          </p:cNvPr>
+          <p:cNvSpPr>
+            <a:spLocks noGrp="1" noRot="1" noChangeAspect="1"/>
+          </p:cNvSpPr>
+          <p:nvPr>
+            <p:ph type="sldImg"/>
+          </p:nvPr>
+        </p:nvSpPr>
+        <p:spPr/>
+      </p:sp>
+      <p:sp>
+        <p:nvSpPr>
+          <p:cNvPr id="3" name="Notes Placeholder 2">
+            <a:extLst>
+              <a:ext uri="{FF2B5EF4-FFF2-40B4-BE49-F238E27FC236}">
+                <a16:creationId xmlns:a16="http://schemas.microsoft.com/office/drawing/2014/main" id="{DDE93ECE-D5FA-291E-35E3-A5E3B58F0CC6}"/>
+              </a:ext>
+            </a:extLst>
+          </p:cNvPr>
+          <p:cNvSpPr>
+            <a:spLocks noGrp="1"/>
+          </p:cNvSpPr>
+          <p:nvPr>
+            <p:ph type="body" idx="1"/>
+          </p:nvPr>
+        </p:nvSpPr>
+        <p:spPr/>
+        <p:txBody>
+          <a:bodyPr/>
+          <a:lstStyle/>
+          <a:p>
+            <a:endParaRPr lang="en-SA" dirty="0"/>
+          </a:p>
+        </p:txBody>
+      </p:sp>
+      <p:sp>
+        <p:nvSpPr>
+          <p:cNvPr id="4" name="Slide Number Placeholder 3">
+            <a:extLst>
+              <a:ext uri="{FF2B5EF4-FFF2-40B4-BE49-F238E27FC236}">
+                <a16:creationId xmlns:a16="http://schemas.microsoft.com/office/drawing/2014/main" id="{E00256FE-3FF5-7283-ED17-8EDCD446388C}"/>
+              </a:ext>
+            </a:extLst>
+          </p:cNvPr>
+          <p:cNvSpPr>
+            <a:spLocks noGrp="1"/>
+          </p:cNvSpPr>
+          <p:nvPr>
+            <p:ph type="sldNum" sz="quarter" idx="5"/>
+          </p:nvPr>
+        </p:nvSpPr>
+        <p:spPr/>
+        <p:txBody>
+          <a:bodyPr/>
+          <a:lstStyle/>
+          <a:p>
+            <a:fld id="{77542409-6A04-4DC6-AC3A-D3758287A8F2}" type="slidenum">
+              <a:rPr lang="en-SA" smtClean="0"/>
+              <a:t>18</a:t>
+            </a:fld>
+            <a:endParaRPr lang="en-SA"/>
+          </a:p>
+        </p:txBody>
+      </p:sp>
+    </p:spTree>
+    <p:extLst>
+      <p:ext uri="{BB962C8B-B14F-4D97-AF65-F5344CB8AC3E}">
+        <p14:creationId xmlns:p14="http://schemas.microsoft.com/office/powerpoint/2010/main" val="3981805760"/>
+      </p:ext>
+    </p:extLst>
+  </p:cSld>
+  <p:clrMapOvr>
+    <a:masterClrMapping/>
+  </p:clrMapOvr>
+</p:notes>
+</file>
+
+<file path=ppt/notesSlides/notesSlide11.xml><?xml version="1.0" encoding="utf-8"?>
+<p:notes xmlns:a="http://schemas.openxmlformats.org/drawingml/2006/main" xmlns:r="http://schemas.openxmlformats.org/officeDocument/2006/relationships" xmlns:p="http://schemas.openxmlformats.org/presentationml/2006/main">
+  <p:cSld>
+    <p:spTree>
+      <p:nvGrpSpPr>
         <p:cNvPr id="1" name=""/>
         <p:cNvGrpSpPr/>
         <p:nvPr/>
@@ -13873,6 +13981,94 @@
 </file>
 
 <file path=ppt/notesSlides/notesSlide4.xml><?xml version="1.0" encoding="utf-8"?>
+<p:notes xmlns:a="http://schemas.openxmlformats.org/drawingml/2006/main" xmlns:r="http://schemas.openxmlformats.org/officeDocument/2006/relationships" xmlns:p="http://schemas.openxmlformats.org/presentationml/2006/main">
+  <p:cSld>
+    <p:spTree>
+      <p:nvGrpSpPr>
+        <p:cNvPr id="1" name=""/>
+        <p:cNvGrpSpPr/>
+        <p:nvPr/>
+      </p:nvGrpSpPr>
+      <p:grpSpPr>
+        <a:xfrm>
+          <a:off x="0" y="0"/>
+          <a:ext cx="0" cy="0"/>
+          <a:chOff x="0" y="0"/>
+          <a:chExt cx="0" cy="0"/>
+        </a:xfrm>
+      </p:grpSpPr>
+      <p:sp>
+        <p:nvSpPr>
+          <p:cNvPr id="2" name="Slide Image Placeholder 1"/>
+          <p:cNvSpPr>
+            <a:spLocks noGrp="1" noRot="1" noChangeAspect="1"/>
+          </p:cNvSpPr>
+          <p:nvPr>
+            <p:ph type="sldImg"/>
+          </p:nvPr>
+        </p:nvSpPr>
+        <p:spPr/>
+      </p:sp>
+      <p:sp>
+        <p:nvSpPr>
+          <p:cNvPr id="3" name="Notes Placeholder 2"/>
+          <p:cNvSpPr>
+            <a:spLocks noGrp="1"/>
+          </p:cNvSpPr>
+          <p:nvPr>
+            <p:ph type="body" idx="1"/>
+          </p:nvPr>
+        </p:nvSpPr>
+        <p:spPr/>
+        <p:txBody>
+          <a:bodyPr/>
+          <a:lstStyle/>
+          <a:p>
+            <a:r>
+              <a:rPr lang="en-US" dirty="0"/>
+              <a:t>Base model → Instruct fine-tuning (SFT) → Preference alignment (RLHF/DPO) → Chat formatting + safety policies</a:t>
+            </a:r>
+            <a:endParaRPr lang="en-SA" dirty="0"/>
+          </a:p>
+        </p:txBody>
+      </p:sp>
+      <p:sp>
+        <p:nvSpPr>
+          <p:cNvPr id="4" name="Slide Number Placeholder 3"/>
+          <p:cNvSpPr>
+            <a:spLocks noGrp="1"/>
+          </p:cNvSpPr>
+          <p:nvPr>
+            <p:ph type="sldNum" sz="quarter" idx="5"/>
+          </p:nvPr>
+        </p:nvSpPr>
+        <p:spPr/>
+        <p:txBody>
+          <a:bodyPr/>
+          <a:lstStyle/>
+          <a:p>
+            <a:fld id="{77542409-6A04-4DC6-AC3A-D3758287A8F2}" type="slidenum">
+              <a:rPr lang="en-SA" smtClean="0"/>
+              <a:t>5</a:t>
+            </a:fld>
+            <a:endParaRPr lang="en-SA"/>
+          </a:p>
+        </p:txBody>
+      </p:sp>
+    </p:spTree>
+    <p:extLst>
+      <p:ext uri="{BB962C8B-B14F-4D97-AF65-F5344CB8AC3E}">
+        <p14:creationId xmlns:p14="http://schemas.microsoft.com/office/powerpoint/2010/main" val="2873775224"/>
+      </p:ext>
+    </p:extLst>
+  </p:cSld>
+  <p:clrMapOvr>
+    <a:masterClrMapping/>
+  </p:clrMapOvr>
+</p:notes>
+</file>
+
+<file path=ppt/notesSlides/notesSlide5.xml><?xml version="1.0" encoding="utf-8"?>
 <p:notes xmlns:a="http://schemas.openxmlformats.org/drawingml/2006/main" xmlns:r="http://schemas.openxmlformats.org/officeDocument/2006/relationships" xmlns:p="http://schemas.openxmlformats.org/presentationml/2006/main">
   <p:cSld>
     <p:spTree>
@@ -13980,129 +14176,6 @@
 </p:notes>
 </file>
 
-<file path=ppt/notesSlides/notesSlide5.xml><?xml version="1.0" encoding="utf-8"?>
-<p:notes xmlns:a="http://schemas.openxmlformats.org/drawingml/2006/main" xmlns:r="http://schemas.openxmlformats.org/officeDocument/2006/relationships" xmlns:p="http://schemas.openxmlformats.org/presentationml/2006/main">
-  <p:cSld>
-    <p:spTree>
-      <p:nvGrpSpPr>
-        <p:cNvPr id="1" name=""/>
-        <p:cNvGrpSpPr/>
-        <p:nvPr/>
-      </p:nvGrpSpPr>
-      <p:grpSpPr>
-        <a:xfrm>
-          <a:off x="0" y="0"/>
-          <a:ext cx="0" cy="0"/>
-          <a:chOff x="0" y="0"/>
-          <a:chExt cx="0" cy="0"/>
-        </a:xfrm>
-      </p:grpSpPr>
-      <p:sp>
-        <p:nvSpPr>
-          <p:cNvPr id="2" name="Slide Image Placeholder 1"/>
-          <p:cNvSpPr>
-            <a:spLocks noGrp="1" noRot="1" noChangeAspect="1"/>
-          </p:cNvSpPr>
-          <p:nvPr>
-            <p:ph type="sldImg"/>
-          </p:nvPr>
-        </p:nvSpPr>
-        <p:spPr/>
-      </p:sp>
-      <p:sp>
-        <p:nvSpPr>
-          <p:cNvPr id="3" name="Notes Placeholder 2"/>
-          <p:cNvSpPr>
-            <a:spLocks noGrp="1"/>
-          </p:cNvSpPr>
-          <p:nvPr>
-            <p:ph type="body" idx="1"/>
-          </p:nvPr>
-        </p:nvSpPr>
-        <p:spPr/>
-        <p:txBody>
-          <a:bodyPr/>
-          <a:lstStyle/>
-          <a:p>
-            <a:pPr marL="0" marR="0" lvl="0" indent="0" algn="l" defTabSz="914400" rtl="0" eaLnBrk="1" fontAlgn="auto" latinLnBrk="0" hangingPunct="1">
-              <a:lnSpc>
-                <a:spcPct val="100000"/>
-              </a:lnSpc>
-              <a:spcBef>
-                <a:spcPts val="0"/>
-              </a:spcBef>
-              <a:spcAft>
-                <a:spcPts val="0"/>
-              </a:spcAft>
-              <a:buClrTx/>
-              <a:buSzTx/>
-              <a:buFontTx/>
-              <a:buNone/>
-              <a:tabLst/>
-              <a:defRPr/>
-            </a:pPr>
-            <a:r>
-              <a:rPr lang="en-US" dirty="0"/>
-              <a:t>TFs don’t bind to a single exact DNA sequence—they bind to </a:t>
-            </a:r>
-            <a:r>
-              <a:rPr lang="en-US" b="1" dirty="0"/>
-              <a:t>families of similar sequences</a:t>
-            </a:r>
-            <a:r>
-              <a:rPr lang="en-US" dirty="0"/>
-              <a:t>. A PWM captures this variability and helps </a:t>
-            </a:r>
-            <a:r>
-              <a:rPr lang="en-US" b="1" dirty="0"/>
-              <a:t>score new sequences</a:t>
-            </a:r>
-            <a:r>
-              <a:rPr lang="en-US" dirty="0"/>
-              <a:t> based on how well they match the known motif.</a:t>
-            </a:r>
-          </a:p>
-          <a:p>
-            <a:endParaRPr lang="en-SA" dirty="0"/>
-          </a:p>
-        </p:txBody>
-      </p:sp>
-      <p:sp>
-        <p:nvSpPr>
-          <p:cNvPr id="4" name="Slide Number Placeholder 3"/>
-          <p:cNvSpPr>
-            <a:spLocks noGrp="1"/>
-          </p:cNvSpPr>
-          <p:nvPr>
-            <p:ph type="sldNum" sz="quarter" idx="5"/>
-          </p:nvPr>
-        </p:nvSpPr>
-        <p:spPr/>
-        <p:txBody>
-          <a:bodyPr/>
-          <a:lstStyle/>
-          <a:p>
-            <a:fld id="{77542409-6A04-4DC6-AC3A-D3758287A8F2}" type="slidenum">
-              <a:rPr lang="en-SA" smtClean="0"/>
-              <a:t>10</a:t>
-            </a:fld>
-            <a:endParaRPr lang="en-SA"/>
-          </a:p>
-        </p:txBody>
-      </p:sp>
-    </p:spTree>
-    <p:extLst>
-      <p:ext uri="{BB962C8B-B14F-4D97-AF65-F5344CB8AC3E}">
-        <p14:creationId xmlns:p14="http://schemas.microsoft.com/office/powerpoint/2010/main" val="2744541816"/>
-      </p:ext>
-    </p:extLst>
-  </p:cSld>
-  <p:clrMapOvr>
-    <a:masterClrMapping/>
-  </p:clrMapOvr>
-</p:notes>
-</file>
-
 <file path=ppt/notesSlides/notesSlide6.xml><?xml version="1.0" encoding="utf-8"?>
 <p:notes xmlns:a="http://schemas.openxmlformats.org/drawingml/2006/main" xmlns:r="http://schemas.openxmlformats.org/officeDocument/2006/relationships" xmlns:p="http://schemas.openxmlformats.org/presentationml/2006/main">
   <p:cSld>
@@ -14147,75 +14220,42 @@
           <a:bodyPr/>
           <a:lstStyle/>
           <a:p>
-            <a:r>
-              <a:rPr lang="en-US" sz="1200" b="0" i="0" kern="1200" dirty="0">
-                <a:solidFill>
-                  <a:schemeClr val="tx1"/>
-                </a:solidFill>
-                <a:effectLst/>
-                <a:latin typeface="+mn-lt"/>
-                <a:ea typeface="+mn-ea"/>
-                <a:cs typeface="+mn-cs"/>
-              </a:rPr>
-              <a:t>A CNN trained on human liver enhancers (e.g., </a:t>
-            </a:r>
-            <a:r>
-              <a:rPr lang="en-US" sz="1200" b="0" i="0" kern="1200" dirty="0" err="1">
-                <a:solidFill>
-                  <a:schemeClr val="tx1"/>
-                </a:solidFill>
-                <a:effectLst/>
-                <a:latin typeface="+mn-lt"/>
-                <a:ea typeface="+mn-ea"/>
-                <a:cs typeface="+mn-cs"/>
-              </a:rPr>
-              <a:t>DeepSEA</a:t>
-            </a:r>
-            <a:r>
-              <a:rPr lang="en-US" sz="1200" b="0" i="0" kern="1200" dirty="0">
-                <a:solidFill>
-                  <a:schemeClr val="tx1"/>
-                </a:solidFill>
-                <a:effectLst/>
-                <a:latin typeface="+mn-lt"/>
-                <a:ea typeface="+mn-ea"/>
-                <a:cs typeface="+mn-cs"/>
-              </a:rPr>
-              <a:t>) typically fails on mouse brain enhancers without retraining because it overfits to species-specific background biases</a:t>
-            </a:r>
-          </a:p>
-          <a:p>
+            <a:pPr marL="0" marR="0" lvl="0" indent="0" algn="l" defTabSz="914400" rtl="0" eaLnBrk="1" fontAlgn="auto" latinLnBrk="0" hangingPunct="1">
+              <a:lnSpc>
+                <a:spcPct val="100000"/>
+              </a:lnSpc>
+              <a:spcBef>
+                <a:spcPts val="0"/>
+              </a:spcBef>
+              <a:spcAft>
+                <a:spcPts val="0"/>
+              </a:spcAft>
+              <a:buClrTx/>
+              <a:buSzTx/>
+              <a:buFontTx/>
+              <a:buNone/>
+              <a:tabLst/>
+              <a:defRPr/>
+            </a:pPr>
+            <a:r>
+              <a:rPr lang="en-US" dirty="0"/>
+              <a:t>TFs don’t bind to a single exact DNA sequence—they bind to </a:t>
+            </a:r>
             <a:r>
               <a:rPr lang="en-US" b="1" dirty="0"/>
-              <a:t>Bias:</a:t>
+              <a:t>families of similar sequences</a:t>
             </a:r>
             <a:r>
               <a:rPr lang="en-US" dirty="0"/>
-              <a:t> Error due to overly simple assumptions (may miss some patterns).</a:t>
-            </a:r>
-          </a:p>
-          <a:p>
+              <a:t>. A PWM captures this variability and helps </a:t>
+            </a:r>
             <a:r>
               <a:rPr lang="en-US" b="1" dirty="0"/>
-              <a:t>Variance:</a:t>
+              <a:t>score new sequences</a:t>
             </a:r>
             <a:r>
               <a:rPr lang="en-US" dirty="0"/>
-              <a:t> Error due to sensitivity to the specific training data (may overfit).</a:t>
-            </a:r>
-          </a:p>
-          <a:p>
-            <a:r>
-              <a:rPr lang="en-US" dirty="0"/>
-              <a:t>So, </a:t>
-            </a:r>
-            <a:r>
-              <a:rPr lang="en-US" b="1" dirty="0"/>
-              <a:t>small, narrow datasets favor models with lower variance</a:t>
-            </a:r>
-            <a:r>
-              <a:rPr lang="en-US" dirty="0"/>
-              <a:t>, which is why traditional ML sometimes beats GFMs in such cases.</a:t>
+              <a:t> based on how well they match the known motif.</a:t>
             </a:r>
           </a:p>
           <a:p>
@@ -14240,7 +14280,7 @@
           <a:p>
             <a:fld id="{77542409-6A04-4DC6-AC3A-D3758287A8F2}" type="slidenum">
               <a:rPr lang="en-SA" smtClean="0"/>
-              <a:t>13</a:t>
+              <a:t>10</a:t>
             </a:fld>
             <a:endParaRPr lang="en-SA"/>
           </a:p>
@@ -14249,7 +14289,7 @@
     </p:spTree>
     <p:extLst>
       <p:ext uri="{BB962C8B-B14F-4D97-AF65-F5344CB8AC3E}">
-        <p14:creationId xmlns:p14="http://schemas.microsoft.com/office/powerpoint/2010/main" val="460764615"/>
+        <p14:creationId xmlns:p14="http://schemas.microsoft.com/office/powerpoint/2010/main" val="2744541816"/>
       </p:ext>
     </p:extLst>
   </p:cSld>
@@ -14303,61 +14343,75 @@
           <a:bodyPr/>
           <a:lstStyle/>
           <a:p>
-            <a:pPr marL="0" marR="0" lvl="0" indent="0" algn="l" defTabSz="914400" rtl="0" eaLnBrk="1" fontAlgn="auto" latinLnBrk="0" hangingPunct="1">
-              <a:lnSpc>
-                <a:spcPct val="100000"/>
-              </a:lnSpc>
-              <a:spcBef>
-                <a:spcPts val="0"/>
-              </a:spcBef>
-              <a:spcAft>
-                <a:spcPts val="0"/>
-              </a:spcAft>
-              <a:buClrTx/>
-              <a:buSzTx/>
-              <a:buFontTx/>
-              <a:buNone/>
-              <a:tabLst/>
-              <a:defRPr/>
-            </a:pPr>
-            <a:r>
-              <a:rPr lang="en-US" b="1" i="0" dirty="0">
+            <a:r>
+              <a:rPr lang="en-US" sz="1200" b="0" i="0" kern="1200" dirty="0">
                 <a:solidFill>
-                  <a:srgbClr val="333333"/>
+                  <a:schemeClr val="tx1"/>
                 </a:solidFill>
                 <a:effectLst/>
-                <a:latin typeface="Segoe UI" panose="020B0502040204020203" pitchFamily="34" charset="0"/>
+                <a:latin typeface="+mn-lt"/>
+                <a:ea typeface="+mn-ea"/>
+                <a:cs typeface="+mn-cs"/>
               </a:rPr>
-              <a:t>Answer: C. They learn rich representations transferable to multiple tasks</a:t>
-            </a:r>
-          </a:p>
-          <a:p>
-            <a:pPr marL="0" marR="0" lvl="0" indent="0" algn="l" defTabSz="914400" rtl="0" eaLnBrk="1" fontAlgn="auto" latinLnBrk="0" hangingPunct="1">
-              <a:lnSpc>
-                <a:spcPct val="100000"/>
-              </a:lnSpc>
-              <a:spcBef>
-                <a:spcPts val="0"/>
-              </a:spcBef>
-              <a:spcAft>
-                <a:spcPts val="0"/>
-              </a:spcAft>
-              <a:buClrTx/>
-              <a:buSzTx/>
-              <a:buFontTx/>
-              <a:buNone/>
-              <a:tabLst/>
-              <a:defRPr/>
-            </a:pPr>
-            <a:r>
-              <a:rPr lang="en-US" b="0" i="0" dirty="0">
+              <a:t>A CNN trained on human liver enhancers (e.g., </a:t>
+            </a:r>
+            <a:r>
+              <a:rPr lang="en-US" sz="1200" b="0" i="0" kern="1200" dirty="0" err="1">
                 <a:solidFill>
-                  <a:srgbClr val="333333"/>
+                  <a:schemeClr val="tx1"/>
                 </a:solidFill>
                 <a:effectLst/>
-                <a:latin typeface="Segoe UI" panose="020B0502040204020203" pitchFamily="34" charset="0"/>
+                <a:latin typeface="+mn-lt"/>
+                <a:ea typeface="+mn-ea"/>
+                <a:cs typeface="+mn-cs"/>
               </a:rPr>
-              <a:t>Foundation models learn generalizable representations from large amounts of data that can be efficiently adapted to multiple downstream tasks through fine-tuning, reducing the need for task-specific data collection and annotation.</a:t>
+              <a:t>DeepSEA</a:t>
+            </a:r>
+            <a:r>
+              <a:rPr lang="en-US" sz="1200" b="0" i="0" kern="1200" dirty="0">
+                <a:solidFill>
+                  <a:schemeClr val="tx1"/>
+                </a:solidFill>
+                <a:effectLst/>
+                <a:latin typeface="+mn-lt"/>
+                <a:ea typeface="+mn-ea"/>
+                <a:cs typeface="+mn-cs"/>
+              </a:rPr>
+              <a:t>) typically fails on mouse brain enhancers without retraining because it overfits to species-specific background biases</a:t>
+            </a:r>
+          </a:p>
+          <a:p>
+            <a:r>
+              <a:rPr lang="en-US" b="1" dirty="0"/>
+              <a:t>Bias:</a:t>
+            </a:r>
+            <a:r>
+              <a:rPr lang="en-US" dirty="0"/>
+              <a:t> Error due to overly simple assumptions (may miss some patterns).</a:t>
+            </a:r>
+          </a:p>
+          <a:p>
+            <a:r>
+              <a:rPr lang="en-US" b="1" dirty="0"/>
+              <a:t>Variance:</a:t>
+            </a:r>
+            <a:r>
+              <a:rPr lang="en-US" dirty="0"/>
+              <a:t> Error due to sensitivity to the specific training data (may overfit).</a:t>
+            </a:r>
+          </a:p>
+          <a:p>
+            <a:r>
+              <a:rPr lang="en-US" dirty="0"/>
+              <a:t>So, </a:t>
+            </a:r>
+            <a:r>
+              <a:rPr lang="en-US" b="1" dirty="0"/>
+              <a:t>small, narrow datasets favor models with lower variance</a:t>
+            </a:r>
+            <a:r>
+              <a:rPr lang="en-US" dirty="0"/>
+              <a:t>, which is why traditional ML sometimes beats GFMs in such cases.</a:t>
             </a:r>
           </a:p>
           <a:p>
@@ -14382,7 +14436,7 @@
           <a:p>
             <a:fld id="{77542409-6A04-4DC6-AC3A-D3758287A8F2}" type="slidenum">
               <a:rPr lang="en-SA" smtClean="0"/>
-              <a:t>15</a:t>
+              <a:t>13</a:t>
             </a:fld>
             <a:endParaRPr lang="en-SA"/>
           </a:p>
@@ -14391,7 +14445,7 @@
     </p:spTree>
     <p:extLst>
       <p:ext uri="{BB962C8B-B14F-4D97-AF65-F5344CB8AC3E}">
-        <p14:creationId xmlns:p14="http://schemas.microsoft.com/office/powerpoint/2010/main" val="3424166180"/>
+        <p14:creationId xmlns:p14="http://schemas.microsoft.com/office/powerpoint/2010/main" val="460764615"/>
       </p:ext>
     </p:extLst>
   </p:cSld>
@@ -14463,30 +14517,46 @@
               <a:defRPr/>
             </a:pPr>
             <a:r>
-              <a:rPr lang="en-US" b="1" dirty="0"/>
-              <a:t>Off-label practice</a:t>
-            </a:r>
-            <a:r>
-              <a:rPr lang="en-US" dirty="0"/>
-              <a:t> means doctors sometimes use drugs to treat conditions they weren’t originally approved for, based on their experience or new evidence.</a:t>
-            </a:r>
-          </a:p>
-          <a:p>
-            <a:endParaRPr lang="en-SA" dirty="0"/>
-          </a:p>
-          <a:p>
-            <a:r>
-              <a:rPr lang="en-US" dirty="0"/>
-              <a:t>Check link for more examples https://</a:t>
-            </a:r>
-            <a:r>
-              <a:rPr lang="en-US" dirty="0" err="1"/>
-              <a:t>watershed.bio</a:t>
-            </a:r>
-            <a:r>
-              <a:rPr lang="en-US" dirty="0"/>
-              <a:t>/resources/foundation-models-for-biomedical-research</a:t>
-            </a:r>
+              <a:rPr lang="en-US" b="1" i="0" dirty="0">
+                <a:solidFill>
+                  <a:srgbClr val="333333"/>
+                </a:solidFill>
+                <a:effectLst/>
+                <a:latin typeface="Segoe UI" panose="020B0502040204020203" pitchFamily="34" charset="0"/>
+              </a:rPr>
+              <a:t>Answer: C. They learn rich representations transferable to multiple tasks</a:t>
+            </a:r>
+          </a:p>
+          <a:p>
+            <a:pPr marL="0" marR="0" lvl="0" indent="0" algn="l" defTabSz="914400" rtl="0" eaLnBrk="1" fontAlgn="auto" latinLnBrk="0" hangingPunct="1">
+              <a:lnSpc>
+                <a:spcPct val="100000"/>
+              </a:lnSpc>
+              <a:spcBef>
+                <a:spcPts val="0"/>
+              </a:spcBef>
+              <a:spcAft>
+                <a:spcPts val="0"/>
+              </a:spcAft>
+              <a:buClrTx/>
+              <a:buSzTx/>
+              <a:buFontTx/>
+              <a:buNone/>
+              <a:tabLst/>
+              <a:defRPr/>
+            </a:pPr>
+            <a:r>
+              <a:rPr lang="en-US" b="0" i="0" dirty="0">
+                <a:solidFill>
+                  <a:srgbClr val="333333"/>
+                </a:solidFill>
+                <a:effectLst/>
+                <a:latin typeface="Segoe UI" panose="020B0502040204020203" pitchFamily="34" charset="0"/>
+              </a:rPr>
+              <a:t>Foundation models learn generalizable representations from large amounts of data that can be efficiently adapted to multiple downstream tasks through fine-tuning, reducing the need for task-specific data collection and annotation.</a:t>
+            </a:r>
+          </a:p>
+          <a:p>
             <a:endParaRPr lang="en-SA" dirty="0"/>
           </a:p>
         </p:txBody>
@@ -14508,7 +14578,7 @@
           <a:p>
             <a:fld id="{77542409-6A04-4DC6-AC3A-D3758287A8F2}" type="slidenum">
               <a:rPr lang="en-SA" smtClean="0"/>
-              <a:t>17</a:t>
+              <a:t>15</a:t>
             </a:fld>
             <a:endParaRPr lang="en-SA"/>
           </a:p>
@@ -14517,7 +14587,7 @@
     </p:spTree>
     <p:extLst>
       <p:ext uri="{BB962C8B-B14F-4D97-AF65-F5344CB8AC3E}">
-        <p14:creationId xmlns:p14="http://schemas.microsoft.com/office/powerpoint/2010/main" val="1581638582"/>
+        <p14:creationId xmlns:p14="http://schemas.microsoft.com/office/powerpoint/2010/main" val="3424166180"/>
       </p:ext>
     </p:extLst>
   </p:cSld>
@@ -14532,13 +14602,7 @@
   <p:cSld>
     <p:spTree>
       <p:nvGrpSpPr>
-        <p:cNvPr id="1" name="">
-          <a:extLst>
-            <a:ext uri="{FF2B5EF4-FFF2-40B4-BE49-F238E27FC236}">
-              <a16:creationId xmlns:a16="http://schemas.microsoft.com/office/drawing/2014/main" id="{EF84D1CD-7D45-E315-2A55-8D9E412034C9}"/>
-            </a:ext>
-          </a:extLst>
-        </p:cNvPr>
+        <p:cNvPr id="1" name=""/>
         <p:cNvGrpSpPr/>
         <p:nvPr/>
       </p:nvGrpSpPr>
@@ -14552,13 +14616,7 @@
       </p:grpSpPr>
       <p:sp>
         <p:nvSpPr>
-          <p:cNvPr id="2" name="Slide Image Placeholder 1">
-            <a:extLst>
-              <a:ext uri="{FF2B5EF4-FFF2-40B4-BE49-F238E27FC236}">
-                <a16:creationId xmlns:a16="http://schemas.microsoft.com/office/drawing/2014/main" id="{3AB6E564-36C0-A37E-BE45-510F0184F57C}"/>
-              </a:ext>
-            </a:extLst>
-          </p:cNvPr>
+          <p:cNvPr id="2" name="Slide Image Placeholder 1"/>
           <p:cNvSpPr>
             <a:spLocks noGrp="1" noRot="1" noChangeAspect="1"/>
           </p:cNvSpPr>
@@ -14570,13 +14628,7 @@
       </p:sp>
       <p:sp>
         <p:nvSpPr>
-          <p:cNvPr id="3" name="Notes Placeholder 2">
-            <a:extLst>
-              <a:ext uri="{FF2B5EF4-FFF2-40B4-BE49-F238E27FC236}">
-                <a16:creationId xmlns:a16="http://schemas.microsoft.com/office/drawing/2014/main" id="{DDE93ECE-D5FA-291E-35E3-A5E3B58F0CC6}"/>
-              </a:ext>
-            </a:extLst>
-          </p:cNvPr>
+          <p:cNvPr id="3" name="Notes Placeholder 2"/>
           <p:cNvSpPr>
             <a:spLocks noGrp="1"/>
           </p:cNvSpPr>
@@ -14589,19 +14641,55 @@
           <a:bodyPr/>
           <a:lstStyle/>
           <a:p>
+            <a:pPr marL="0" marR="0" lvl="0" indent="0" algn="l" defTabSz="914400" rtl="0" eaLnBrk="1" fontAlgn="auto" latinLnBrk="0" hangingPunct="1">
+              <a:lnSpc>
+                <a:spcPct val="100000"/>
+              </a:lnSpc>
+              <a:spcBef>
+                <a:spcPts val="0"/>
+              </a:spcBef>
+              <a:spcAft>
+                <a:spcPts val="0"/>
+              </a:spcAft>
+              <a:buClrTx/>
+              <a:buSzTx/>
+              <a:buFontTx/>
+              <a:buNone/>
+              <a:tabLst/>
+              <a:defRPr/>
+            </a:pPr>
+            <a:r>
+              <a:rPr lang="en-US" b="1" dirty="0"/>
+              <a:t>Off-label practice</a:t>
+            </a:r>
+            <a:r>
+              <a:rPr lang="en-US" dirty="0"/>
+              <a:t> means doctors sometimes use drugs to treat conditions they weren’t originally approved for, based on their experience or new evidence.</a:t>
+            </a:r>
+          </a:p>
+          <a:p>
+            <a:endParaRPr lang="en-SA" dirty="0"/>
+          </a:p>
+          <a:p>
+            <a:r>
+              <a:rPr lang="en-US" dirty="0"/>
+              <a:t>Check link for more examples https://</a:t>
+            </a:r>
+            <a:r>
+              <a:rPr lang="en-US" dirty="0" err="1"/>
+              <a:t>watershed.bio</a:t>
+            </a:r>
+            <a:r>
+              <a:rPr lang="en-US" dirty="0"/>
+              <a:t>/resources/foundation-models-for-biomedical-research</a:t>
+            </a:r>
             <a:endParaRPr lang="en-SA" dirty="0"/>
           </a:p>
         </p:txBody>
       </p:sp>
       <p:sp>
         <p:nvSpPr>
-          <p:cNvPr id="4" name="Slide Number Placeholder 3">
-            <a:extLst>
-              <a:ext uri="{FF2B5EF4-FFF2-40B4-BE49-F238E27FC236}">
-                <a16:creationId xmlns:a16="http://schemas.microsoft.com/office/drawing/2014/main" id="{E00256FE-3FF5-7283-ED17-8EDCD446388C}"/>
-              </a:ext>
-            </a:extLst>
-          </p:cNvPr>
+          <p:cNvPr id="4" name="Slide Number Placeholder 3"/>
           <p:cNvSpPr>
             <a:spLocks noGrp="1"/>
           </p:cNvSpPr>
@@ -14616,7 +14704,7 @@
           <a:p>
             <a:fld id="{77542409-6A04-4DC6-AC3A-D3758287A8F2}" type="slidenum">
               <a:rPr lang="en-SA" smtClean="0"/>
-              <a:t>18</a:t>
+              <a:t>17</a:t>
             </a:fld>
             <a:endParaRPr lang="en-SA"/>
           </a:p>
@@ -14625,7 +14713,7 @@
     </p:spTree>
     <p:extLst>
       <p:ext uri="{BB962C8B-B14F-4D97-AF65-F5344CB8AC3E}">
-        <p14:creationId xmlns:p14="http://schemas.microsoft.com/office/powerpoint/2010/main" val="3981805760"/>
+        <p14:creationId xmlns:p14="http://schemas.microsoft.com/office/powerpoint/2010/main" val="1581638582"/>
       </p:ext>
     </p:extLst>
   </p:cSld>
@@ -18797,7 +18885,7 @@
             <a:pPr lvl="1"/>
             <a:r>
               <a:rPr lang="en-US" dirty="0"/>
-              <a:t>No transferability; each new context = new model</a:t>
+              <a:t>Little transferability; each new context may need a new model</a:t>
             </a:r>
           </a:p>
           <a:p>
@@ -20221,7 +20309,7 @@
             <p:ph idx="1"/>
             <p:extLst>
               <p:ext uri="{D42A27DB-BD31-4B8C-83A1-F6EECF244321}">
-                <p14:modId xmlns:p14="http://schemas.microsoft.com/office/powerpoint/2010/main" val="173815646"/>
+                <p14:modId xmlns:p14="http://schemas.microsoft.com/office/powerpoint/2010/main" val="3851429268"/>
               </p:ext>
             </p:extLst>
           </p:nvPr>
@@ -20764,7 +20852,7 @@
           <p:nvPr>
             <p:extLst>
               <p:ext uri="{D42A27DB-BD31-4B8C-83A1-F6EECF244321}">
-                <p14:modId xmlns:p14="http://schemas.microsoft.com/office/powerpoint/2010/main" val="171796925"/>
+                <p14:modId xmlns:p14="http://schemas.microsoft.com/office/powerpoint/2010/main" val="3752107985"/>
               </p:ext>
             </p:extLst>
           </p:nvPr>
@@ -21573,14 +21661,7 @@
           <a:p>
             <a:r>
               <a:rPr lang="en-US" dirty="0"/>
-              <a:t>Enabling Foundation Models: </a:t>
-            </a:r>
-            <a:br>
-              <a:rPr lang="en-US" dirty="0"/>
-            </a:br>
-            <a:r>
-              <a:rPr lang="en-US" dirty="0"/>
-              <a:t>Key Breakthroughs in Deep Learning</a:t>
+              <a:t>From Simple Neural Networks to LLMs</a:t>
             </a:r>
             <a:endParaRPr lang="en-SA" dirty="0"/>
           </a:p>
@@ -21768,7 +21849,7 @@
             </a:pPr>
             <a:r>
               <a:rPr lang="en-US" dirty="0"/>
-              <a:t>Model token probabilities, </a:t>
+              <a:t>Models a probability distribution over tokens</a:t>
             </a:r>
           </a:p>
           <a:p>
@@ -21778,7 +21859,7 @@
             </a:pPr>
             <a:r>
               <a:rPr lang="en-US" dirty="0"/>
-              <a:t>(typically) by minimizing cross-entropy loss over tokens</a:t>
+              <a:t>(Typically) by minimizing cross-entropy loss over tokens</a:t>
             </a:r>
             <a:endParaRPr lang="en-SA" dirty="0">
               <a:solidFill>
@@ -22284,15 +22365,15 @@
           </p:nvPr>
         </p:nvPicPr>
         <p:blipFill>
-          <a:blip r:embed="rId2"/>
+          <a:blip r:embed="rId3"/>
           <a:stretch>
             <a:fillRect/>
           </a:stretch>
         </p:blipFill>
         <p:spPr>
           <a:xfrm>
-            <a:off x="1409700" y="2635555"/>
-            <a:ext cx="9372600" cy="2480652"/>
+            <a:off x="964532" y="2517732"/>
+            <a:ext cx="9817768" cy="2598475"/>
           </a:xfrm>
           <a:prstGeom prst="rect">
             <a:avLst/>
@@ -24505,12 +24586,23 @@
 </file>
 
 <file path=customXml/item1.xml><?xml version="1.0" encoding="utf-8"?>
-<?mso-contentType ?>
-<FormTemplates xmlns="http://schemas.microsoft.com/sharepoint/v3/contenttype/forms">
-  <Display>DocumentLibraryForm</Display>
-  <Edit>DocumentLibraryForm</Edit>
-  <New>DocumentLibraryForm</New>
-</FormTemplates>
+<p:properties xmlns:p="http://schemas.microsoft.com/office/2006/metadata/properties" xmlns:xsi="http://www.w3.org/2001/XMLSchema-instance" xmlns:pc="http://schemas.microsoft.com/office/infopath/2007/PartnerControls">
+  <documentManagement>
+    <_ip_UnifiedCompliancePolicyUIAction xmlns="http://schemas.microsoft.com/sharepoint/v3" xsi:nil="true"/>
+    <Image xmlns="71af3243-3dd4-4a8d-8c0d-dd76da1f02a5">
+      <Url xsi:nil="true"/>
+      <Description xsi:nil="true"/>
+    </Image>
+    <Status xmlns="71af3243-3dd4-4a8d-8c0d-dd76da1f02a5">Not started</Status>
+    <Background xmlns="71af3243-3dd4-4a8d-8c0d-dd76da1f02a5">false</Background>
+    <_ip_UnifiedCompliancePolicyProperties xmlns="http://schemas.microsoft.com/sharepoint/v3" xsi:nil="true"/>
+    <ImageTagsTaxHTField xmlns="71af3243-3dd4-4a8d-8c0d-dd76da1f02a5">
+      <Terms xmlns="http://schemas.microsoft.com/office/infopath/2007/PartnerControls"/>
+    </ImageTagsTaxHTField>
+    <TaxCatchAll xmlns="230e9df3-be65-4c73-a93b-d1236ebd677e" xsi:nil="true"/>
+    <MediaServiceKeyPoints xmlns="71af3243-3dd4-4a8d-8c0d-dd76da1f02a5" xsi:nil="true"/>
+  </documentManagement>
+</p:properties>
 </file>
 
 <file path=customXml/item2.xml><?xml version="1.0" encoding="utf-8"?>
@@ -24820,29 +24912,29 @@
 </file>
 
 <file path=customXml/item3.xml><?xml version="1.0" encoding="utf-8"?>
-<p:properties xmlns:p="http://schemas.microsoft.com/office/2006/metadata/properties" xmlns:xsi="http://www.w3.org/2001/XMLSchema-instance" xmlns:pc="http://schemas.microsoft.com/office/infopath/2007/PartnerControls">
-  <documentManagement>
-    <_ip_UnifiedCompliancePolicyUIAction xmlns="http://schemas.microsoft.com/sharepoint/v3" xsi:nil="true"/>
-    <Image xmlns="71af3243-3dd4-4a8d-8c0d-dd76da1f02a5">
-      <Url xsi:nil="true"/>
-      <Description xsi:nil="true"/>
-    </Image>
-    <Status xmlns="71af3243-3dd4-4a8d-8c0d-dd76da1f02a5">Not started</Status>
-    <Background xmlns="71af3243-3dd4-4a8d-8c0d-dd76da1f02a5">false</Background>
-    <_ip_UnifiedCompliancePolicyProperties xmlns="http://schemas.microsoft.com/sharepoint/v3" xsi:nil="true"/>
-    <ImageTagsTaxHTField xmlns="71af3243-3dd4-4a8d-8c0d-dd76da1f02a5">
-      <Terms xmlns="http://schemas.microsoft.com/office/infopath/2007/PartnerControls"/>
-    </ImageTagsTaxHTField>
-    <TaxCatchAll xmlns="230e9df3-be65-4c73-a93b-d1236ebd677e" xsi:nil="true"/>
-    <MediaServiceKeyPoints xmlns="71af3243-3dd4-4a8d-8c0d-dd76da1f02a5" xsi:nil="true"/>
-  </documentManagement>
-</p:properties>
+<?mso-contentType ?>
+<FormTemplates xmlns="http://schemas.microsoft.com/sharepoint/v3/contenttype/forms">
+  <Display>DocumentLibraryForm</Display>
+  <Edit>DocumentLibraryForm</Edit>
+  <New>DocumentLibraryForm</New>
+</FormTemplates>
 </file>
 
 <file path=customXml/itemProps1.xml><?xml version="1.0" encoding="utf-8"?>
-<ds:datastoreItem xmlns:ds="http://schemas.openxmlformats.org/officeDocument/2006/customXml" ds:itemID="{78F2847D-96C7-4634-93AB-D232DDB6E5EB}">
+<ds:datastoreItem xmlns:ds="http://schemas.openxmlformats.org/officeDocument/2006/customXml" ds:itemID="{4D18307F-863E-465D-9426-B14DA0CBD25E}">
   <ds:schemaRefs>
-    <ds:schemaRef ds:uri="http://schemas.microsoft.com/sharepoint/v3/contenttype/forms"/>
+    <ds:schemaRef ds:uri="http://schemas.microsoft.com/sharepoint/v3"/>
+    <ds:schemaRef ds:uri="16c05727-aa75-4e4a-9b5f-8a80a1165891"/>
+    <ds:schemaRef ds:uri="http://schemas.microsoft.com/office/2006/metadata/properties"/>
+    <ds:schemaRef ds:uri="http://www.w3.org/XML/1998/namespace"/>
+    <ds:schemaRef ds:uri="230e9df3-be65-4c73-a93b-d1236ebd677e"/>
+    <ds:schemaRef ds:uri="http://purl.org/dc/terms/"/>
+    <ds:schemaRef ds:uri="http://schemas.microsoft.com/office/infopath/2007/PartnerControls"/>
+    <ds:schemaRef ds:uri="http://schemas.microsoft.com/office/2006/documentManagement/types"/>
+    <ds:schemaRef ds:uri="http://purl.org/dc/elements/1.1/"/>
+    <ds:schemaRef ds:uri="http://schemas.openxmlformats.org/package/2006/metadata/core-properties"/>
+    <ds:schemaRef ds:uri="71af3243-3dd4-4a8d-8c0d-dd76da1f02a5"/>
+    <ds:schemaRef ds:uri="http://purl.org/dc/dcmitype/"/>
   </ds:schemaRefs>
 </ds:datastoreItem>
 </file>
@@ -24869,20 +24961,9 @@
 </file>
 
 <file path=customXml/itemProps3.xml><?xml version="1.0" encoding="utf-8"?>
-<ds:datastoreItem xmlns:ds="http://schemas.openxmlformats.org/officeDocument/2006/customXml" ds:itemID="{4D18307F-863E-465D-9426-B14DA0CBD25E}">
+<ds:datastoreItem xmlns:ds="http://schemas.openxmlformats.org/officeDocument/2006/customXml" ds:itemID="{78F2847D-96C7-4634-93AB-D232DDB6E5EB}">
   <ds:schemaRefs>
-    <ds:schemaRef ds:uri="http://schemas.microsoft.com/sharepoint/v3"/>
-    <ds:schemaRef ds:uri="16c05727-aa75-4e4a-9b5f-8a80a1165891"/>
-    <ds:schemaRef ds:uri="http://schemas.microsoft.com/office/2006/metadata/properties"/>
-    <ds:schemaRef ds:uri="http://www.w3.org/XML/1998/namespace"/>
-    <ds:schemaRef ds:uri="230e9df3-be65-4c73-a93b-d1236ebd677e"/>
-    <ds:schemaRef ds:uri="http://purl.org/dc/terms/"/>
-    <ds:schemaRef ds:uri="http://schemas.microsoft.com/office/infopath/2007/PartnerControls"/>
-    <ds:schemaRef ds:uri="http://schemas.microsoft.com/office/2006/documentManagement/types"/>
-    <ds:schemaRef ds:uri="http://purl.org/dc/elements/1.1/"/>
-    <ds:schemaRef ds:uri="http://schemas.openxmlformats.org/package/2006/metadata/core-properties"/>
-    <ds:schemaRef ds:uri="71af3243-3dd4-4a8d-8c0d-dd76da1f02a5"/>
-    <ds:schemaRef ds:uri="http://purl.org/dc/dcmitype/"/>
+    <ds:schemaRef ds:uri="http://schemas.microsoft.com/sharepoint/v3/contenttype/forms"/>
   </ds:schemaRefs>
 </ds:datastoreItem>
 </file>
